--- a/public/lessons/year-6-maths/spring/week-18/generate-equivalent-ratios/teaching-powerpoint-v1.pptx
+++ b/public/lessons/year-6-maths/spring/week-18/generate-equivalent-ratios/teaching-powerpoint-v1.pptx
@@ -2,24 +2,24 @@
 <file path=ppt/presentation.xml><?xml version="1.0" encoding="utf-8"?>
 <p:presentation xmlns:p="http://schemas.openxmlformats.org/presentationml/2006/main">
   <p:sldMasterIdLst>
-    <p:sldMasterId xmlns:r="http://schemas.openxmlformats.org/officeDocument/2006/relationships" id="2147483648" r:id="R7ef0e7ed35b94979"/>
+    <p:sldMasterId xmlns:r="http://schemas.openxmlformats.org/officeDocument/2006/relationships" id="2147483648" r:id="R689e9cfd460e485c"/>
   </p:sldMasterIdLst>
   <p:notesMasterIdLst>
-    <p:notesMasterId xmlns:r="http://schemas.openxmlformats.org/officeDocument/2006/relationships" r:id="Ra10ff42409464dc3"/>
+    <p:notesMasterId xmlns:r="http://schemas.openxmlformats.org/officeDocument/2006/relationships" r:id="R012dd24d79b74340"/>
   </p:notesMasterIdLst>
   <p:sldIdLst>
-    <p:sldId xmlns:r="http://schemas.openxmlformats.org/officeDocument/2006/relationships" id="256" r:id="R91782cc9c2cd47fa"/>
-    <p:sldId xmlns:r="http://schemas.openxmlformats.org/officeDocument/2006/relationships" id="257" r:id="R375d1e57c65c4fbe"/>
-    <p:sldId xmlns:r="http://schemas.openxmlformats.org/officeDocument/2006/relationships" id="258" r:id="Rf170b7bf7e774b95"/>
-    <p:sldId xmlns:r="http://schemas.openxmlformats.org/officeDocument/2006/relationships" id="259" r:id="Rb5edeeda54a04244"/>
-    <p:sldId xmlns:r="http://schemas.openxmlformats.org/officeDocument/2006/relationships" id="260" r:id="Ra2e5574bdfb64b90"/>
-    <p:sldId xmlns:r="http://schemas.openxmlformats.org/officeDocument/2006/relationships" id="261" r:id="R1def71290fd64160"/>
-    <p:sldId xmlns:r="http://schemas.openxmlformats.org/officeDocument/2006/relationships" id="262" r:id="Rc9099148699f4432"/>
-    <p:sldId xmlns:r="http://schemas.openxmlformats.org/officeDocument/2006/relationships" id="263" r:id="R8f4e7accb1ea40a3"/>
-    <p:sldId xmlns:r="http://schemas.openxmlformats.org/officeDocument/2006/relationships" id="264" r:id="R126c184e140640fe"/>
-    <p:sldId xmlns:r="http://schemas.openxmlformats.org/officeDocument/2006/relationships" id="265" r:id="R8833e8392ea5494a"/>
-    <p:sldId xmlns:r="http://schemas.openxmlformats.org/officeDocument/2006/relationships" id="266" r:id="Rf62a2d869bae4d70"/>
-    <p:sldId xmlns:r="http://schemas.openxmlformats.org/officeDocument/2006/relationships" id="267" r:id="Ree89b0eb4c3a4414"/>
+    <p:sldId xmlns:r="http://schemas.openxmlformats.org/officeDocument/2006/relationships" id="256" r:id="R00494cd6440247f5"/>
+    <p:sldId xmlns:r="http://schemas.openxmlformats.org/officeDocument/2006/relationships" id="257" r:id="Rfad3a5991eec435c"/>
+    <p:sldId xmlns:r="http://schemas.openxmlformats.org/officeDocument/2006/relationships" id="258" r:id="Rdf1de58ee2e04340"/>
+    <p:sldId xmlns:r="http://schemas.openxmlformats.org/officeDocument/2006/relationships" id="259" r:id="R19b3b1b8ac9b4490"/>
+    <p:sldId xmlns:r="http://schemas.openxmlformats.org/officeDocument/2006/relationships" id="260" r:id="R8e03ea75c16e42d5"/>
+    <p:sldId xmlns:r="http://schemas.openxmlformats.org/officeDocument/2006/relationships" id="261" r:id="Rff503625d147423a"/>
+    <p:sldId xmlns:r="http://schemas.openxmlformats.org/officeDocument/2006/relationships" id="262" r:id="Ra4cfd6c2bbbc4913"/>
+    <p:sldId xmlns:r="http://schemas.openxmlformats.org/officeDocument/2006/relationships" id="263" r:id="Ra73382fdd8eb4748"/>
+    <p:sldId xmlns:r="http://schemas.openxmlformats.org/officeDocument/2006/relationships" id="264" r:id="R22307c17f3cb4335"/>
+    <p:sldId xmlns:r="http://schemas.openxmlformats.org/officeDocument/2006/relationships" id="265" r:id="R9a9746497ac94fa9"/>
+    <p:sldId xmlns:r="http://schemas.openxmlformats.org/officeDocument/2006/relationships" id="266" r:id="R7b9a0735641f458c"/>
+    <p:sldId xmlns:r="http://schemas.openxmlformats.org/officeDocument/2006/relationships" id="267" r:id="R35abe8bf915a44dd"/>
   </p:sldIdLst>
   <p:sldSz cx="12192000" cy="6858000"/>
   <p:notesSz cx="6858000" cy="9144000"/>
@@ -873,7 +873,7 @@
           <a:lstStyle xmlns:a="http://schemas.openxmlformats.org/drawingml/2006/main"/>
           <a:p xmlns:a="http://schemas.openxmlformats.org/drawingml/2006/main">
             <a:r>
-              <a:t>I do. Reveal the question, setup and each calculation stage one click at a time. Pupils watch before copying. Model answer: 16.</a:t>
+              <a:t>I do. Reveal the question, then reveal each mathematical change one click at a time. Point to the numbers and operation that changed before moving to the next line. Final answer: 16.</a:t>
             </a:r>
           </a:p>
         </p:txBody>
@@ -1291,7 +1291,7 @@
   </p:cSld>
   <p:clrMap bg1="lt1" tx1="dk1" bg2="lt2" tx2="dk2" accent1="accent1" accent2="accent2" accent3="accent3" accent4="accent4" accent5="accent5" accent6="accent6" hlink="hlink" folHlink="folHlink"/>
   <p:sldLayoutIdLst>
-    <p:sldLayoutId xmlns:r="http://schemas.openxmlformats.org/officeDocument/2006/relationships" id="2147483649" r:id="Ra8d5175454cc49fe"/>
+    <p:sldLayoutId xmlns:r="http://schemas.openxmlformats.org/officeDocument/2006/relationships" id="2147483649" r:id="R1c7fcd46617b4fa1"/>
   </p:sldLayoutIdLst>
   <p:txStyles>
     <p:titleStyle>
@@ -1842,7 +1842,7 @@
           <p:cNvPr id="12" name="">
             <a:extLst xmlns:a="http://schemas.openxmlformats.org/drawingml/2006/main">
               <a:ext uri="{FF2B5EF4-FFF2-40B4-BE49-F238E27FC236}">
-                <a16:creationId xmlns:a16="http://schemas.microsoft.com/office/drawing/2014/main" id="{1EB0F815-A1DF-4216-8B48-8FEB5C2C9C66}"/>
+                <a16:creationId xmlns:a16="http://schemas.microsoft.com/office/drawing/2014/main" id="{9680F7B1-80DC-4AE3-8F42-96944A178BB4}"/>
               </a:ext>
             </a:extLst>
           </p:cNvPr>
@@ -1874,7 +1874,7 @@
           <p:cNvPr id="2" name="">
             <a:extLst xmlns:a="http://schemas.openxmlformats.org/drawingml/2006/main">
               <a:ext uri="{FF2B5EF4-FFF2-40B4-BE49-F238E27FC236}">
-                <a16:creationId xmlns:a16="http://schemas.microsoft.com/office/drawing/2014/main" id="{23032F97-F4B7-45E0-AD8C-E3AC69816EB3}"/>
+                <a16:creationId xmlns:a16="http://schemas.microsoft.com/office/drawing/2014/main" id="{878D1F8F-4A73-47AB-A191-FEEBC5E9A878}"/>
               </a:ext>
             </a:extLst>
           </p:cNvPr>
@@ -1931,7 +1931,7 @@
           <p:cNvPr id="3" name="">
             <a:extLst xmlns:a="http://schemas.openxmlformats.org/drawingml/2006/main">
               <a:ext uri="{FF2B5EF4-FFF2-40B4-BE49-F238E27FC236}">
-                <a16:creationId xmlns:a16="http://schemas.microsoft.com/office/drawing/2014/main" id="{66BCCA97-5EF1-4532-A0DD-26D7FC025309}"/>
+                <a16:creationId xmlns:a16="http://schemas.microsoft.com/office/drawing/2014/main" id="{AF91A316-7A23-4215-A0A8-8AE0FFCAF611}"/>
               </a:ext>
             </a:extLst>
           </p:cNvPr>
@@ -1965,7 +1965,7 @@
           <p:cNvPr id="4" name="">
             <a:extLst xmlns:a="http://schemas.openxmlformats.org/drawingml/2006/main">
               <a:ext uri="{FF2B5EF4-FFF2-40B4-BE49-F238E27FC236}">
-                <a16:creationId xmlns:a16="http://schemas.microsoft.com/office/drawing/2014/main" id="{8890C739-374F-4831-964A-B208800D9545}"/>
+                <a16:creationId xmlns:a16="http://schemas.microsoft.com/office/drawing/2014/main" id="{0C1A2F5B-0F89-474D-9256-512C67DAB931}"/>
               </a:ext>
             </a:extLst>
           </p:cNvPr>
@@ -2022,7 +2022,7 @@
           <p:cNvPr id="5" name="">
             <a:extLst xmlns:a="http://schemas.openxmlformats.org/drawingml/2006/main">
               <a:ext uri="{FF2B5EF4-FFF2-40B4-BE49-F238E27FC236}">
-                <a16:creationId xmlns:a16="http://schemas.microsoft.com/office/drawing/2014/main" id="{3498F11A-91E5-4F8F-8E68-8AC82CBCF6DF}"/>
+                <a16:creationId xmlns:a16="http://schemas.microsoft.com/office/drawing/2014/main" id="{7F051ECD-2FDC-4B75-8CD9-CB2D48B80F3A}"/>
               </a:ext>
             </a:extLst>
           </p:cNvPr>
@@ -2079,7 +2079,7 @@
           <p:cNvPr id="6" name="">
             <a:extLst xmlns:a="http://schemas.openxmlformats.org/drawingml/2006/main">
               <a:ext uri="{FF2B5EF4-FFF2-40B4-BE49-F238E27FC236}">
-                <a16:creationId xmlns:a16="http://schemas.microsoft.com/office/drawing/2014/main" id="{0E2DAC55-1752-4A05-BA4C-ABE84AB73D05}"/>
+                <a16:creationId xmlns:a16="http://schemas.microsoft.com/office/drawing/2014/main" id="{E082DE95-6F52-4B5D-A648-4D8A4B03A660}"/>
               </a:ext>
             </a:extLst>
           </p:cNvPr>
@@ -2113,7 +2113,7 @@
           <p:cNvPr id="7" name="">
             <a:extLst xmlns:a="http://schemas.openxmlformats.org/drawingml/2006/main">
               <a:ext uri="{FF2B5EF4-FFF2-40B4-BE49-F238E27FC236}">
-                <a16:creationId xmlns:a16="http://schemas.microsoft.com/office/drawing/2014/main" id="{E25ECD9F-88F2-4424-8EB7-3F5042E0496A}"/>
+                <a16:creationId xmlns:a16="http://schemas.microsoft.com/office/drawing/2014/main" id="{B1114DA6-7567-4DDE-86C4-6BD485BCEE0F}"/>
               </a:ext>
             </a:extLst>
           </p:cNvPr>
@@ -2170,7 +2170,7 @@
           <p:cNvPr id="8" name="">
             <a:extLst xmlns:a="http://schemas.openxmlformats.org/drawingml/2006/main">
               <a:ext uri="{FF2B5EF4-FFF2-40B4-BE49-F238E27FC236}">
-                <a16:creationId xmlns:a16="http://schemas.microsoft.com/office/drawing/2014/main" id="{B75CB0E1-56C3-418A-96E1-1DC9E8160415}"/>
+                <a16:creationId xmlns:a16="http://schemas.microsoft.com/office/drawing/2014/main" id="{E3E3C2A5-786D-49BC-95BA-D3482CF1DDD1}"/>
               </a:ext>
             </a:extLst>
           </p:cNvPr>
@@ -2227,7 +2227,7 @@
           <p:cNvPr id="9" name="">
             <a:extLst xmlns:a="http://schemas.openxmlformats.org/drawingml/2006/main">
               <a:ext uri="{FF2B5EF4-FFF2-40B4-BE49-F238E27FC236}">
-                <a16:creationId xmlns:a16="http://schemas.microsoft.com/office/drawing/2014/main" id="{A1EC6BD9-9966-4DEB-9408-807EF6290821}"/>
+                <a16:creationId xmlns:a16="http://schemas.microsoft.com/office/drawing/2014/main" id="{D7EE3A03-A16A-4E6F-9ED3-A1C7AA3CA8AC}"/>
               </a:ext>
             </a:extLst>
           </p:cNvPr>
@@ -2284,7 +2284,7 @@
           <p:cNvPr id="10" name="">
             <a:extLst xmlns:a="http://schemas.openxmlformats.org/drawingml/2006/main">
               <a:ext uri="{FF2B5EF4-FFF2-40B4-BE49-F238E27FC236}">
-                <a16:creationId xmlns:a16="http://schemas.microsoft.com/office/drawing/2014/main" id="{B99019B7-9CDF-4E50-90DE-C2862C64D499}"/>
+                <a16:creationId xmlns:a16="http://schemas.microsoft.com/office/drawing/2014/main" id="{F6528CD0-705C-4A67-9C89-E458614DF343}"/>
               </a:ext>
             </a:extLst>
           </p:cNvPr>
@@ -2341,7 +2341,7 @@
           <p:cNvPr id="11" name="">
             <a:extLst xmlns:a="http://schemas.openxmlformats.org/drawingml/2006/main">
               <a:ext uri="{FF2B5EF4-FFF2-40B4-BE49-F238E27FC236}">
-                <a16:creationId xmlns:a16="http://schemas.microsoft.com/office/drawing/2014/main" id="{F9DCDB48-44C8-4FE0-9AD2-B1754A02F86F}"/>
+                <a16:creationId xmlns:a16="http://schemas.microsoft.com/office/drawing/2014/main" id="{B96CB13E-769F-47F9-A81C-3EC6B6C4D9D8}"/>
               </a:ext>
             </a:extLst>
           </p:cNvPr>
@@ -2396,7 +2396,7 @@
     </p:spTree>
     <p:extLst>
       <p:ext uri="{BB962C8B-B14F-4D97-AF65-F5344CB8AC3E}">
-        <p14:creationId xmlns:p14="http://schemas.microsoft.com/office/powerpoint/2010/main" val="451629977"/>
+        <p14:creationId xmlns:p14="http://schemas.microsoft.com/office/powerpoint/2010/main" val="1450416773"/>
       </p:ext>
     </p:extLst>
   </p:cSld>
@@ -2427,7 +2427,7 @@
           <p:cNvPr id="14" name="">
             <a:extLst xmlns:a="http://schemas.openxmlformats.org/drawingml/2006/main">
               <a:ext uri="{FF2B5EF4-FFF2-40B4-BE49-F238E27FC236}">
-                <a16:creationId xmlns:a16="http://schemas.microsoft.com/office/drawing/2014/main" id="{6B2598BC-E38D-4335-B960-F69DA3C5281F}"/>
+                <a16:creationId xmlns:a16="http://schemas.microsoft.com/office/drawing/2014/main" id="{B7E190D1-B9A9-450C-BEF6-5D8E924F1F22}"/>
               </a:ext>
             </a:extLst>
           </p:cNvPr>
@@ -2459,7 +2459,7 @@
           <p:cNvPr id="2" name="">
             <a:extLst xmlns:a="http://schemas.openxmlformats.org/drawingml/2006/main">
               <a:ext uri="{FF2B5EF4-FFF2-40B4-BE49-F238E27FC236}">
-                <a16:creationId xmlns:a16="http://schemas.microsoft.com/office/drawing/2014/main" id="{70024AF3-C100-4D43-A00F-18836E280C5A}"/>
+                <a16:creationId xmlns:a16="http://schemas.microsoft.com/office/drawing/2014/main" id="{A9169D58-AC36-4C7A-BC85-FCC72873C087}"/>
               </a:ext>
             </a:extLst>
           </p:cNvPr>
@@ -2516,7 +2516,7 @@
           <p:cNvPr id="3" name="">
             <a:extLst xmlns:a="http://schemas.openxmlformats.org/drawingml/2006/main">
               <a:ext uri="{FF2B5EF4-FFF2-40B4-BE49-F238E27FC236}">
-                <a16:creationId xmlns:a16="http://schemas.microsoft.com/office/drawing/2014/main" id="{81A4913C-0E1F-4EC0-8FE7-383A4F0C5187}"/>
+                <a16:creationId xmlns:a16="http://schemas.microsoft.com/office/drawing/2014/main" id="{871D291B-0423-4E11-B25F-740E83F37C37}"/>
               </a:ext>
             </a:extLst>
           </p:cNvPr>
@@ -2548,7 +2548,7 @@
           <p:cNvPr id="4" name="">
             <a:extLst xmlns:a="http://schemas.openxmlformats.org/drawingml/2006/main">
               <a:ext uri="{FF2B5EF4-FFF2-40B4-BE49-F238E27FC236}">
-                <a16:creationId xmlns:a16="http://schemas.microsoft.com/office/drawing/2014/main" id="{C665A52F-6378-4A6F-986B-C36F9AD8FCA1}"/>
+                <a16:creationId xmlns:a16="http://schemas.microsoft.com/office/drawing/2014/main" id="{3EC5EB5B-86B1-41BC-B16F-12D26063A52D}"/>
               </a:ext>
             </a:extLst>
           </p:cNvPr>
@@ -2605,7 +2605,7 @@
           <p:cNvPr id="5" name="">
             <a:extLst xmlns:a="http://schemas.openxmlformats.org/drawingml/2006/main">
               <a:ext uri="{FF2B5EF4-FFF2-40B4-BE49-F238E27FC236}">
-                <a16:creationId xmlns:a16="http://schemas.microsoft.com/office/drawing/2014/main" id="{796B4501-4CA0-43D5-A1AB-8851825DE996}"/>
+                <a16:creationId xmlns:a16="http://schemas.microsoft.com/office/drawing/2014/main" id="{84CC263C-9CD4-4382-8927-C92F02B48335}"/>
               </a:ext>
             </a:extLst>
           </p:cNvPr>
@@ -2662,7 +2662,7 @@
           <p:cNvPr id="6" name="">
             <a:extLst xmlns:a="http://schemas.openxmlformats.org/drawingml/2006/main">
               <a:ext uri="{FF2B5EF4-FFF2-40B4-BE49-F238E27FC236}">
-                <a16:creationId xmlns:a16="http://schemas.microsoft.com/office/drawing/2014/main" id="{58ACBF95-7A61-462D-B69D-EF38EB95F90F}"/>
+                <a16:creationId xmlns:a16="http://schemas.microsoft.com/office/drawing/2014/main" id="{899F0E76-4FBA-49F8-98A6-781982427196}"/>
               </a:ext>
             </a:extLst>
           </p:cNvPr>
@@ -2719,7 +2719,7 @@
           <p:cNvPr id="7" name="">
             <a:extLst xmlns:a="http://schemas.openxmlformats.org/drawingml/2006/main">
               <a:ext uri="{FF2B5EF4-FFF2-40B4-BE49-F238E27FC236}">
-                <a16:creationId xmlns:a16="http://schemas.microsoft.com/office/drawing/2014/main" id="{86013FE1-B652-4E6A-B9D4-C829EB77B5F7}"/>
+                <a16:creationId xmlns:a16="http://schemas.microsoft.com/office/drawing/2014/main" id="{4582B4E3-7E31-4BCB-9DE6-0C6FBF338086}"/>
               </a:ext>
             </a:extLst>
           </p:cNvPr>
@@ -2751,7 +2751,7 @@
           <p:cNvPr id="8" name="">
             <a:extLst xmlns:a="http://schemas.openxmlformats.org/drawingml/2006/main">
               <a:ext uri="{FF2B5EF4-FFF2-40B4-BE49-F238E27FC236}">
-                <a16:creationId xmlns:a16="http://schemas.microsoft.com/office/drawing/2014/main" id="{459E96DF-A9E1-403D-96E0-978CCAC3FCF5}"/>
+                <a16:creationId xmlns:a16="http://schemas.microsoft.com/office/drawing/2014/main" id="{55EF024B-35CF-4266-9D6E-2058CB7473E6}"/>
               </a:ext>
             </a:extLst>
           </p:cNvPr>
@@ -2808,7 +2808,7 @@
           <p:cNvPr id="9" name="">
             <a:extLst xmlns:a="http://schemas.openxmlformats.org/drawingml/2006/main">
               <a:ext uri="{FF2B5EF4-FFF2-40B4-BE49-F238E27FC236}">
-                <a16:creationId xmlns:a16="http://schemas.microsoft.com/office/drawing/2014/main" id="{F96A18FF-0EF2-41B5-89C5-BC457C05A261}"/>
+                <a16:creationId xmlns:a16="http://schemas.microsoft.com/office/drawing/2014/main" id="{0A74F576-C6E2-436D-B1C6-A21FBD168781}"/>
               </a:ext>
             </a:extLst>
           </p:cNvPr>
@@ -2865,7 +2865,7 @@
           <p:cNvPr id="10" name="">
             <a:extLst xmlns:a="http://schemas.openxmlformats.org/drawingml/2006/main">
               <a:ext uri="{FF2B5EF4-FFF2-40B4-BE49-F238E27FC236}">
-                <a16:creationId xmlns:a16="http://schemas.microsoft.com/office/drawing/2014/main" id="{C40F42C9-F43C-4034-9615-1BAB4FBF81A1}"/>
+                <a16:creationId xmlns:a16="http://schemas.microsoft.com/office/drawing/2014/main" id="{93132BD3-9D6D-4AD7-AF0A-B7DE06DC8DD1}"/>
               </a:ext>
             </a:extLst>
           </p:cNvPr>
@@ -2922,7 +2922,7 @@
           <p:cNvPr id="11" name="">
             <a:extLst xmlns:a="http://schemas.openxmlformats.org/drawingml/2006/main">
               <a:ext uri="{FF2B5EF4-FFF2-40B4-BE49-F238E27FC236}">
-                <a16:creationId xmlns:a16="http://schemas.microsoft.com/office/drawing/2014/main" id="{91DDCFBB-8663-4F96-A9A4-23966848B409}"/>
+                <a16:creationId xmlns:a16="http://schemas.microsoft.com/office/drawing/2014/main" id="{27823F01-7A9F-4423-9313-AC2D4E6C6233}"/>
               </a:ext>
             </a:extLst>
           </p:cNvPr>
@@ -2979,7 +2979,7 @@
           <p:cNvPr id="12" name="">
             <a:extLst xmlns:a="http://schemas.openxmlformats.org/drawingml/2006/main">
               <a:ext uri="{FF2B5EF4-FFF2-40B4-BE49-F238E27FC236}">
-                <a16:creationId xmlns:a16="http://schemas.microsoft.com/office/drawing/2014/main" id="{06E51F20-AE13-4B16-8A17-C4C586DCB565}"/>
+                <a16:creationId xmlns:a16="http://schemas.microsoft.com/office/drawing/2014/main" id="{F77F6859-5138-4C9D-97E6-602AE5E0CE93}"/>
               </a:ext>
             </a:extLst>
           </p:cNvPr>
@@ -3036,7 +3036,7 @@
           <p:cNvPr id="13" name="">
             <a:extLst xmlns:a="http://schemas.openxmlformats.org/drawingml/2006/main">
               <a:ext uri="{FF2B5EF4-FFF2-40B4-BE49-F238E27FC236}">
-                <a16:creationId xmlns:a16="http://schemas.microsoft.com/office/drawing/2014/main" id="{36390847-4121-49EA-9910-3F2F3A6E4438}"/>
+                <a16:creationId xmlns:a16="http://schemas.microsoft.com/office/drawing/2014/main" id="{B0B19834-6C94-4887-8B39-77317667E75C}"/>
               </a:ext>
             </a:extLst>
           </p:cNvPr>
@@ -3091,7 +3091,7 @@
     </p:spTree>
     <p:extLst>
       <p:ext uri="{BB962C8B-B14F-4D97-AF65-F5344CB8AC3E}">
-        <p14:creationId xmlns:p14="http://schemas.microsoft.com/office/powerpoint/2010/main" val="148416783"/>
+        <p14:creationId xmlns:p14="http://schemas.microsoft.com/office/powerpoint/2010/main" val="2062836130"/>
       </p:ext>
     </p:extLst>
   </p:cSld>
@@ -3292,7 +3292,7 @@
           <p:cNvPr id="19" name="">
             <a:extLst xmlns:a="http://schemas.openxmlformats.org/drawingml/2006/main">
               <a:ext uri="{FF2B5EF4-FFF2-40B4-BE49-F238E27FC236}">
-                <a16:creationId xmlns:a16="http://schemas.microsoft.com/office/drawing/2014/main" id="{0F61818A-FBC6-40A8-920A-AB70EED69CFA}"/>
+                <a16:creationId xmlns:a16="http://schemas.microsoft.com/office/drawing/2014/main" id="{6840A22F-D799-49FB-830D-B090ED74C37C}"/>
               </a:ext>
             </a:extLst>
           </p:cNvPr>
@@ -3324,7 +3324,7 @@
           <p:cNvPr id="2" name="">
             <a:extLst xmlns:a="http://schemas.openxmlformats.org/drawingml/2006/main">
               <a:ext uri="{FF2B5EF4-FFF2-40B4-BE49-F238E27FC236}">
-                <a16:creationId xmlns:a16="http://schemas.microsoft.com/office/drawing/2014/main" id="{FC5ABFDE-A95E-499D-90C8-C40EEE522DFD}"/>
+                <a16:creationId xmlns:a16="http://schemas.microsoft.com/office/drawing/2014/main" id="{E12D49D3-4F58-4F9A-A4DA-C0559DDE5FD9}"/>
               </a:ext>
             </a:extLst>
           </p:cNvPr>
@@ -3381,7 +3381,7 @@
           <p:cNvPr id="3" name="">
             <a:extLst xmlns:a="http://schemas.openxmlformats.org/drawingml/2006/main">
               <a:ext uri="{FF2B5EF4-FFF2-40B4-BE49-F238E27FC236}">
-                <a16:creationId xmlns:a16="http://schemas.microsoft.com/office/drawing/2014/main" id="{8B9E5971-A998-44BE-B0BC-D5B2EC94C7E4}"/>
+                <a16:creationId xmlns:a16="http://schemas.microsoft.com/office/drawing/2014/main" id="{ACDC8A71-9CF2-49F4-8981-A1D67CD7E346}"/>
               </a:ext>
             </a:extLst>
           </p:cNvPr>
@@ -3413,7 +3413,7 @@
           <p:cNvPr id="4" name="">
             <a:extLst xmlns:a="http://schemas.openxmlformats.org/drawingml/2006/main">
               <a:ext uri="{FF2B5EF4-FFF2-40B4-BE49-F238E27FC236}">
-                <a16:creationId xmlns:a16="http://schemas.microsoft.com/office/drawing/2014/main" id="{B0E5CAA0-64CD-4216-BF03-4538CAF05EE7}"/>
+                <a16:creationId xmlns:a16="http://schemas.microsoft.com/office/drawing/2014/main" id="{6F664A58-B671-41C8-A3A4-54D749A7EDC0}"/>
               </a:ext>
             </a:extLst>
           </p:cNvPr>
@@ -3470,7 +3470,7 @@
           <p:cNvPr id="5" name="">
             <a:extLst xmlns:a="http://schemas.openxmlformats.org/drawingml/2006/main">
               <a:ext uri="{FF2B5EF4-FFF2-40B4-BE49-F238E27FC236}">
-                <a16:creationId xmlns:a16="http://schemas.microsoft.com/office/drawing/2014/main" id="{0BA6192C-8CF9-4F17-BB6F-DB6D10D54D4B}"/>
+                <a16:creationId xmlns:a16="http://schemas.microsoft.com/office/drawing/2014/main" id="{562D2082-73D6-4DE0-97D2-4C1C7B83EB6C}"/>
               </a:ext>
             </a:extLst>
           </p:cNvPr>
@@ -3527,7 +3527,7 @@
           <p:cNvPr id="6" name="">
             <a:extLst xmlns:a="http://schemas.openxmlformats.org/drawingml/2006/main">
               <a:ext uri="{FF2B5EF4-FFF2-40B4-BE49-F238E27FC236}">
-                <a16:creationId xmlns:a16="http://schemas.microsoft.com/office/drawing/2014/main" id="{6CF083BC-6B67-4D34-AD40-BDF9DF58DB45}"/>
+                <a16:creationId xmlns:a16="http://schemas.microsoft.com/office/drawing/2014/main" id="{1BC18751-609A-4EF2-B53F-ECFCB164AAF5}"/>
               </a:ext>
             </a:extLst>
           </p:cNvPr>
@@ -3584,7 +3584,7 @@
           <p:cNvPr id="7" name="">
             <a:extLst xmlns:a="http://schemas.openxmlformats.org/drawingml/2006/main">
               <a:ext uri="{FF2B5EF4-FFF2-40B4-BE49-F238E27FC236}">
-                <a16:creationId xmlns:a16="http://schemas.microsoft.com/office/drawing/2014/main" id="{D8B47891-96A2-41B1-925A-BDB2A999310F}"/>
+                <a16:creationId xmlns:a16="http://schemas.microsoft.com/office/drawing/2014/main" id="{A611FE71-1818-4BA9-92C2-18F726788FFB}"/>
               </a:ext>
             </a:extLst>
           </p:cNvPr>
@@ -3616,7 +3616,7 @@
           <p:cNvPr id="8" name="">
             <a:extLst xmlns:a="http://schemas.openxmlformats.org/drawingml/2006/main">
               <a:ext uri="{FF2B5EF4-FFF2-40B4-BE49-F238E27FC236}">
-                <a16:creationId xmlns:a16="http://schemas.microsoft.com/office/drawing/2014/main" id="{C3D5B2B4-33B3-4EAE-8D6B-7B0ACDF15A13}"/>
+                <a16:creationId xmlns:a16="http://schemas.microsoft.com/office/drawing/2014/main" id="{E75AE70E-13C9-483D-AAD5-292DD140922B}"/>
               </a:ext>
             </a:extLst>
           </p:cNvPr>
@@ -3673,7 +3673,7 @@
           <p:cNvPr id="9" name="">
             <a:extLst xmlns:a="http://schemas.openxmlformats.org/drawingml/2006/main">
               <a:ext uri="{FF2B5EF4-FFF2-40B4-BE49-F238E27FC236}">
-                <a16:creationId xmlns:a16="http://schemas.microsoft.com/office/drawing/2014/main" id="{84EA9A5E-7B40-494D-A6C3-2F4CEC4F58AA}"/>
+                <a16:creationId xmlns:a16="http://schemas.microsoft.com/office/drawing/2014/main" id="{4A4462E4-BB59-4776-B943-F8FF1E2DF1B5}"/>
               </a:ext>
             </a:extLst>
           </p:cNvPr>
@@ -3730,7 +3730,7 @@
           <p:cNvPr id="10" name="">
             <a:extLst xmlns:a="http://schemas.openxmlformats.org/drawingml/2006/main">
               <a:ext uri="{FF2B5EF4-FFF2-40B4-BE49-F238E27FC236}">
-                <a16:creationId xmlns:a16="http://schemas.microsoft.com/office/drawing/2014/main" id="{02E949AE-529E-469E-8B30-92D94DBA611C}"/>
+                <a16:creationId xmlns:a16="http://schemas.microsoft.com/office/drawing/2014/main" id="{49E4F7C3-EA61-42DF-9973-048196D850A2}"/>
               </a:ext>
             </a:extLst>
           </p:cNvPr>
@@ -3787,7 +3787,7 @@
           <p:cNvPr id="11" name="">
             <a:extLst xmlns:a="http://schemas.openxmlformats.org/drawingml/2006/main">
               <a:ext uri="{FF2B5EF4-FFF2-40B4-BE49-F238E27FC236}">
-                <a16:creationId xmlns:a16="http://schemas.microsoft.com/office/drawing/2014/main" id="{F1F08A59-7E9B-4D6F-B7A0-82E550253637}"/>
+                <a16:creationId xmlns:a16="http://schemas.microsoft.com/office/drawing/2014/main" id="{8A5FEA11-4046-4EA6-B0DA-B155DB282A94}"/>
               </a:ext>
             </a:extLst>
           </p:cNvPr>
@@ -3821,7 +3821,7 @@
           <p:cNvPr id="12" name="">
             <a:extLst xmlns:a="http://schemas.openxmlformats.org/drawingml/2006/main">
               <a:ext uri="{FF2B5EF4-FFF2-40B4-BE49-F238E27FC236}">
-                <a16:creationId xmlns:a16="http://schemas.microsoft.com/office/drawing/2014/main" id="{02C1E0FD-75B1-4113-9846-857C8BE7FC3B}"/>
+                <a16:creationId xmlns:a16="http://schemas.microsoft.com/office/drawing/2014/main" id="{DE577A92-FC3D-4C93-AAB7-28C6B209D1A1}"/>
               </a:ext>
             </a:extLst>
           </p:cNvPr>
@@ -3878,7 +3878,7 @@
           <p:cNvPr id="13" name="">
             <a:extLst xmlns:a="http://schemas.openxmlformats.org/drawingml/2006/main">
               <a:ext uri="{FF2B5EF4-FFF2-40B4-BE49-F238E27FC236}">
-                <a16:creationId xmlns:a16="http://schemas.microsoft.com/office/drawing/2014/main" id="{AF311670-C56E-4029-A077-EB02476AF9C9}"/>
+                <a16:creationId xmlns:a16="http://schemas.microsoft.com/office/drawing/2014/main" id="{9EFC778D-E9F0-4FFC-BE9D-290A3F5D1A55}"/>
               </a:ext>
             </a:extLst>
           </p:cNvPr>
@@ -3935,7 +3935,7 @@
           <p:cNvPr id="14" name="">
             <a:extLst xmlns:a="http://schemas.openxmlformats.org/drawingml/2006/main">
               <a:ext uri="{FF2B5EF4-FFF2-40B4-BE49-F238E27FC236}">
-                <a16:creationId xmlns:a16="http://schemas.microsoft.com/office/drawing/2014/main" id="{2AEB8937-2B9E-486C-8916-1F339A6C0A98}"/>
+                <a16:creationId xmlns:a16="http://schemas.microsoft.com/office/drawing/2014/main" id="{3D81BABC-6321-44C5-9D9C-8DF1D18F39EC}"/>
               </a:ext>
             </a:extLst>
           </p:cNvPr>
@@ -3992,7 +3992,7 @@
           <p:cNvPr id="15" name="">
             <a:extLst xmlns:a="http://schemas.openxmlformats.org/drawingml/2006/main">
               <a:ext uri="{FF2B5EF4-FFF2-40B4-BE49-F238E27FC236}">
-                <a16:creationId xmlns:a16="http://schemas.microsoft.com/office/drawing/2014/main" id="{11E2A3D3-4873-484C-82DF-4E89124B6C53}"/>
+                <a16:creationId xmlns:a16="http://schemas.microsoft.com/office/drawing/2014/main" id="{700E2AC0-D089-42AE-A2D0-13BCECA509F1}"/>
               </a:ext>
             </a:extLst>
           </p:cNvPr>
@@ -4026,7 +4026,7 @@
           <p:cNvPr id="16" name="">
             <a:extLst xmlns:a="http://schemas.openxmlformats.org/drawingml/2006/main">
               <a:ext uri="{FF2B5EF4-FFF2-40B4-BE49-F238E27FC236}">
-                <a16:creationId xmlns:a16="http://schemas.microsoft.com/office/drawing/2014/main" id="{A867F486-FBD7-45A0-9641-E5A2BEE0E08C}"/>
+                <a16:creationId xmlns:a16="http://schemas.microsoft.com/office/drawing/2014/main" id="{23366E73-F2F6-457A-885B-3014A65B0C3B}"/>
               </a:ext>
             </a:extLst>
           </p:cNvPr>
@@ -4083,7 +4083,7 @@
           <p:cNvPr id="17" name="">
             <a:extLst xmlns:a="http://schemas.openxmlformats.org/drawingml/2006/main">
               <a:ext uri="{FF2B5EF4-FFF2-40B4-BE49-F238E27FC236}">
-                <a16:creationId xmlns:a16="http://schemas.microsoft.com/office/drawing/2014/main" id="{76858B1A-1F1A-484A-97F2-4723F0DDAD97}"/>
+                <a16:creationId xmlns:a16="http://schemas.microsoft.com/office/drawing/2014/main" id="{0D0EB1A1-8C2C-49E9-866B-C3B6B693D721}"/>
               </a:ext>
             </a:extLst>
           </p:cNvPr>
@@ -4140,7 +4140,7 @@
           <p:cNvPr id="18" name="">
             <a:extLst xmlns:a="http://schemas.openxmlformats.org/drawingml/2006/main">
               <a:ext uri="{FF2B5EF4-FFF2-40B4-BE49-F238E27FC236}">
-                <a16:creationId xmlns:a16="http://schemas.microsoft.com/office/drawing/2014/main" id="{83E22F4F-72D0-42CA-A2E1-02DBE95B0858}"/>
+                <a16:creationId xmlns:a16="http://schemas.microsoft.com/office/drawing/2014/main" id="{3B0CB001-A27D-4925-A1EB-789CA103B4CE}"/>
               </a:ext>
             </a:extLst>
           </p:cNvPr>
@@ -4195,7 +4195,7 @@
     </p:spTree>
     <p:extLst>
       <p:ext uri="{BB962C8B-B14F-4D97-AF65-F5344CB8AC3E}">
-        <p14:creationId xmlns:p14="http://schemas.microsoft.com/office/powerpoint/2010/main" val="1584424528"/>
+        <p14:creationId xmlns:p14="http://schemas.microsoft.com/office/powerpoint/2010/main" val="1650843039"/>
       </p:ext>
     </p:extLst>
   </p:cSld>
@@ -4350,7 +4350,7 @@
           <p:cNvPr id="23" name="">
             <a:extLst xmlns:a="http://schemas.openxmlformats.org/drawingml/2006/main">
               <a:ext uri="{FF2B5EF4-FFF2-40B4-BE49-F238E27FC236}">
-                <a16:creationId xmlns:a16="http://schemas.microsoft.com/office/drawing/2014/main" id="{3F696820-9E5C-4E5C-8719-C796393DA910}"/>
+                <a16:creationId xmlns:a16="http://schemas.microsoft.com/office/drawing/2014/main" id="{AECDC060-B2CA-41E4-BED2-80CA466EAF0B}"/>
               </a:ext>
             </a:extLst>
           </p:cNvPr>
@@ -4382,7 +4382,7 @@
           <p:cNvPr id="2" name="">
             <a:extLst xmlns:a="http://schemas.openxmlformats.org/drawingml/2006/main">
               <a:ext uri="{FF2B5EF4-FFF2-40B4-BE49-F238E27FC236}">
-                <a16:creationId xmlns:a16="http://schemas.microsoft.com/office/drawing/2014/main" id="{28228881-BD4D-469B-BB13-6230DE2DBD27}"/>
+                <a16:creationId xmlns:a16="http://schemas.microsoft.com/office/drawing/2014/main" id="{E59B1E10-EA1E-4A5C-90BC-A831BA432678}"/>
               </a:ext>
             </a:extLst>
           </p:cNvPr>
@@ -4439,7 +4439,7 @@
           <p:cNvPr id="3" name="">
             <a:extLst xmlns:a="http://schemas.openxmlformats.org/drawingml/2006/main">
               <a:ext uri="{FF2B5EF4-FFF2-40B4-BE49-F238E27FC236}">
-                <a16:creationId xmlns:a16="http://schemas.microsoft.com/office/drawing/2014/main" id="{C93AAB88-9491-4DD4-91F3-CD3F3042F939}"/>
+                <a16:creationId xmlns:a16="http://schemas.microsoft.com/office/drawing/2014/main" id="{007BF488-A2C9-4F26-8308-2CDBCF7D63F1}"/>
               </a:ext>
             </a:extLst>
           </p:cNvPr>
@@ -4471,7 +4471,7 @@
           <p:cNvPr id="4" name="">
             <a:extLst xmlns:a="http://schemas.openxmlformats.org/drawingml/2006/main">
               <a:ext uri="{FF2B5EF4-FFF2-40B4-BE49-F238E27FC236}">
-                <a16:creationId xmlns:a16="http://schemas.microsoft.com/office/drawing/2014/main" id="{B3CBB8B8-3566-4FCA-B097-8CA719DEC4A0}"/>
+                <a16:creationId xmlns:a16="http://schemas.microsoft.com/office/drawing/2014/main" id="{2E2FF0D1-BB5E-4A3B-A70B-1EDE7B5712FF}"/>
               </a:ext>
             </a:extLst>
           </p:cNvPr>
@@ -4528,7 +4528,7 @@
           <p:cNvPr id="5" name="">
             <a:extLst xmlns:a="http://schemas.openxmlformats.org/drawingml/2006/main">
               <a:ext uri="{FF2B5EF4-FFF2-40B4-BE49-F238E27FC236}">
-                <a16:creationId xmlns:a16="http://schemas.microsoft.com/office/drawing/2014/main" id="{5236191D-9888-4911-BAEC-506F8A27C3A3}"/>
+                <a16:creationId xmlns:a16="http://schemas.microsoft.com/office/drawing/2014/main" id="{96664CC1-80E2-4DAF-B301-994E15102F10}"/>
               </a:ext>
             </a:extLst>
           </p:cNvPr>
@@ -4585,7 +4585,7 @@
           <p:cNvPr id="6" name="">
             <a:extLst xmlns:a="http://schemas.openxmlformats.org/drawingml/2006/main">
               <a:ext uri="{FF2B5EF4-FFF2-40B4-BE49-F238E27FC236}">
-                <a16:creationId xmlns:a16="http://schemas.microsoft.com/office/drawing/2014/main" id="{7AC9BD1B-FBB5-4A2C-8DA0-9C3F919AAFF6}"/>
+                <a16:creationId xmlns:a16="http://schemas.microsoft.com/office/drawing/2014/main" id="{B82A762A-76F1-456A-9382-BC68F25F76AF}"/>
               </a:ext>
             </a:extLst>
           </p:cNvPr>
@@ -4642,7 +4642,7 @@
           <p:cNvPr id="7" name="">
             <a:extLst xmlns:a="http://schemas.openxmlformats.org/drawingml/2006/main">
               <a:ext uri="{FF2B5EF4-FFF2-40B4-BE49-F238E27FC236}">
-                <a16:creationId xmlns:a16="http://schemas.microsoft.com/office/drawing/2014/main" id="{E5EA901A-4E1A-464E-AAFC-E7F67A86B7E8}"/>
+                <a16:creationId xmlns:a16="http://schemas.microsoft.com/office/drawing/2014/main" id="{DFAAB9D4-8E62-455E-9C4E-F3B2548B983D}"/>
               </a:ext>
             </a:extLst>
           </p:cNvPr>
@@ -4674,7 +4674,7 @@
           <p:cNvPr id="8" name="">
             <a:extLst xmlns:a="http://schemas.openxmlformats.org/drawingml/2006/main">
               <a:ext uri="{FF2B5EF4-FFF2-40B4-BE49-F238E27FC236}">
-                <a16:creationId xmlns:a16="http://schemas.microsoft.com/office/drawing/2014/main" id="{F91941C9-90C0-436C-A61D-B2F970A331BB}"/>
+                <a16:creationId xmlns:a16="http://schemas.microsoft.com/office/drawing/2014/main" id="{D82014D3-2B2E-4CFB-8889-315E0215901A}"/>
               </a:ext>
             </a:extLst>
           </p:cNvPr>
@@ -4731,7 +4731,7 @@
           <p:cNvPr id="9" name="">
             <a:extLst xmlns:a="http://schemas.openxmlformats.org/drawingml/2006/main">
               <a:ext uri="{FF2B5EF4-FFF2-40B4-BE49-F238E27FC236}">
-                <a16:creationId xmlns:a16="http://schemas.microsoft.com/office/drawing/2014/main" id="{D8374714-804B-47D5-AB19-33EB4FBF74E7}"/>
+                <a16:creationId xmlns:a16="http://schemas.microsoft.com/office/drawing/2014/main" id="{55614EB8-0119-4948-AEE2-48FA1FCCF63F}"/>
               </a:ext>
             </a:extLst>
           </p:cNvPr>
@@ -4788,7 +4788,7 @@
           <p:cNvPr id="10" name="">
             <a:extLst xmlns:a="http://schemas.openxmlformats.org/drawingml/2006/main">
               <a:ext uri="{FF2B5EF4-FFF2-40B4-BE49-F238E27FC236}">
-                <a16:creationId xmlns:a16="http://schemas.microsoft.com/office/drawing/2014/main" id="{06368830-1987-4ECB-BFD7-75508E25E665}"/>
+                <a16:creationId xmlns:a16="http://schemas.microsoft.com/office/drawing/2014/main" id="{BA36D1EC-BD43-4807-9386-481F843DC771}"/>
               </a:ext>
             </a:extLst>
           </p:cNvPr>
@@ -4822,7 +4822,7 @@
           <p:cNvPr id="11" name="">
             <a:extLst xmlns:a="http://schemas.openxmlformats.org/drawingml/2006/main">
               <a:ext uri="{FF2B5EF4-FFF2-40B4-BE49-F238E27FC236}">
-                <a16:creationId xmlns:a16="http://schemas.microsoft.com/office/drawing/2014/main" id="{CFBFB40E-51DE-46E9-8FAA-0D21D1503A4E}"/>
+                <a16:creationId xmlns:a16="http://schemas.microsoft.com/office/drawing/2014/main" id="{083503B2-7691-4D47-9CDA-1259A86C3495}"/>
               </a:ext>
             </a:extLst>
           </p:cNvPr>
@@ -4854,7 +4854,7 @@
           <p:cNvPr id="12" name="">
             <a:extLst xmlns:a="http://schemas.openxmlformats.org/drawingml/2006/main">
               <a:ext uri="{FF2B5EF4-FFF2-40B4-BE49-F238E27FC236}">
-                <a16:creationId xmlns:a16="http://schemas.microsoft.com/office/drawing/2014/main" id="{8637ACB8-C9E5-43EA-8837-A276B7F86858}"/>
+                <a16:creationId xmlns:a16="http://schemas.microsoft.com/office/drawing/2014/main" id="{AA5A67AF-DC5A-4288-B57E-46CD43AFED80}"/>
               </a:ext>
             </a:extLst>
           </p:cNvPr>
@@ -4911,7 +4911,7 @@
           <p:cNvPr id="13" name="">
             <a:extLst xmlns:a="http://schemas.openxmlformats.org/drawingml/2006/main">
               <a:ext uri="{FF2B5EF4-FFF2-40B4-BE49-F238E27FC236}">
-                <a16:creationId xmlns:a16="http://schemas.microsoft.com/office/drawing/2014/main" id="{8AE7755A-7E48-47EB-B354-81B12F690D73}"/>
+                <a16:creationId xmlns:a16="http://schemas.microsoft.com/office/drawing/2014/main" id="{A2DAC5A8-B3B9-4E72-AD4F-11D09CEE3EA9}"/>
               </a:ext>
             </a:extLst>
           </p:cNvPr>
@@ -4968,7 +4968,7 @@
           <p:cNvPr id="14" name="">
             <a:extLst xmlns:a="http://schemas.openxmlformats.org/drawingml/2006/main">
               <a:ext uri="{FF2B5EF4-FFF2-40B4-BE49-F238E27FC236}">
-                <a16:creationId xmlns:a16="http://schemas.microsoft.com/office/drawing/2014/main" id="{D6A64F3E-3272-4768-B675-8F9898FDA22F}"/>
+                <a16:creationId xmlns:a16="http://schemas.microsoft.com/office/drawing/2014/main" id="{1F4EC8F0-3701-4E21-B9B1-E840F4C2BA87}"/>
               </a:ext>
             </a:extLst>
           </p:cNvPr>
@@ -5002,7 +5002,7 @@
           <p:cNvPr id="15" name="">
             <a:extLst xmlns:a="http://schemas.openxmlformats.org/drawingml/2006/main">
               <a:ext uri="{FF2B5EF4-FFF2-40B4-BE49-F238E27FC236}">
-                <a16:creationId xmlns:a16="http://schemas.microsoft.com/office/drawing/2014/main" id="{8D557808-28FF-46FB-9A91-F646D06D7ECC}"/>
+                <a16:creationId xmlns:a16="http://schemas.microsoft.com/office/drawing/2014/main" id="{A42C7704-EAF3-42C2-9E31-8DB97020DFBE}"/>
               </a:ext>
             </a:extLst>
           </p:cNvPr>
@@ -5034,7 +5034,7 @@
           <p:cNvPr id="16" name="">
             <a:extLst xmlns:a="http://schemas.openxmlformats.org/drawingml/2006/main">
               <a:ext uri="{FF2B5EF4-FFF2-40B4-BE49-F238E27FC236}">
-                <a16:creationId xmlns:a16="http://schemas.microsoft.com/office/drawing/2014/main" id="{1F0B1206-8432-4851-B22C-A8A0DEE58CCD}"/>
+                <a16:creationId xmlns:a16="http://schemas.microsoft.com/office/drawing/2014/main" id="{1988E4D1-4CD7-465B-A056-6699CCEFB552}"/>
               </a:ext>
             </a:extLst>
           </p:cNvPr>
@@ -5091,7 +5091,7 @@
           <p:cNvPr id="17" name="">
             <a:extLst xmlns:a="http://schemas.openxmlformats.org/drawingml/2006/main">
               <a:ext uri="{FF2B5EF4-FFF2-40B4-BE49-F238E27FC236}">
-                <a16:creationId xmlns:a16="http://schemas.microsoft.com/office/drawing/2014/main" id="{60B720E6-B72F-4B8B-A7E6-8AD922352160}"/>
+                <a16:creationId xmlns:a16="http://schemas.microsoft.com/office/drawing/2014/main" id="{1025E5A8-ACF2-4767-8853-8A856D5DCA84}"/>
               </a:ext>
             </a:extLst>
           </p:cNvPr>
@@ -5148,7 +5148,7 @@
           <p:cNvPr id="18" name="">
             <a:extLst xmlns:a="http://schemas.openxmlformats.org/drawingml/2006/main">
               <a:ext uri="{FF2B5EF4-FFF2-40B4-BE49-F238E27FC236}">
-                <a16:creationId xmlns:a16="http://schemas.microsoft.com/office/drawing/2014/main" id="{E9BB0085-A5B1-4984-A7A0-ED7C3C5F0EFE}"/>
+                <a16:creationId xmlns:a16="http://schemas.microsoft.com/office/drawing/2014/main" id="{3E58DD2F-E347-42A8-9320-47B12C16EFC5}"/>
               </a:ext>
             </a:extLst>
           </p:cNvPr>
@@ -5182,7 +5182,7 @@
           <p:cNvPr id="19" name="">
             <a:extLst xmlns:a="http://schemas.openxmlformats.org/drawingml/2006/main">
               <a:ext uri="{FF2B5EF4-FFF2-40B4-BE49-F238E27FC236}">
-                <a16:creationId xmlns:a16="http://schemas.microsoft.com/office/drawing/2014/main" id="{F93570E9-6D98-4E72-A3DC-6E25DF72295F}"/>
+                <a16:creationId xmlns:a16="http://schemas.microsoft.com/office/drawing/2014/main" id="{A3A45F21-545C-49B5-8D1B-B7AE9ABEEFA0}"/>
               </a:ext>
             </a:extLst>
           </p:cNvPr>
@@ -5214,7 +5214,7 @@
           <p:cNvPr id="20" name="">
             <a:extLst xmlns:a="http://schemas.openxmlformats.org/drawingml/2006/main">
               <a:ext uri="{FF2B5EF4-FFF2-40B4-BE49-F238E27FC236}">
-                <a16:creationId xmlns:a16="http://schemas.microsoft.com/office/drawing/2014/main" id="{347EE1F3-0B72-4A5A-8488-41148F990E22}"/>
+                <a16:creationId xmlns:a16="http://schemas.microsoft.com/office/drawing/2014/main" id="{913428A9-5172-4F4A-A9DC-AD7F64DE5B2F}"/>
               </a:ext>
             </a:extLst>
           </p:cNvPr>
@@ -5271,7 +5271,7 @@
           <p:cNvPr id="21" name="">
             <a:extLst xmlns:a="http://schemas.openxmlformats.org/drawingml/2006/main">
               <a:ext uri="{FF2B5EF4-FFF2-40B4-BE49-F238E27FC236}">
-                <a16:creationId xmlns:a16="http://schemas.microsoft.com/office/drawing/2014/main" id="{02F65465-39C1-4907-B491-C3441A244C0C}"/>
+                <a16:creationId xmlns:a16="http://schemas.microsoft.com/office/drawing/2014/main" id="{30D2B948-7B1B-4D58-A74E-05D5991E8C81}"/>
               </a:ext>
             </a:extLst>
           </p:cNvPr>
@@ -5328,7 +5328,7 @@
           <p:cNvPr id="22" name="">
             <a:extLst xmlns:a="http://schemas.openxmlformats.org/drawingml/2006/main">
               <a:ext uri="{FF2B5EF4-FFF2-40B4-BE49-F238E27FC236}">
-                <a16:creationId xmlns:a16="http://schemas.microsoft.com/office/drawing/2014/main" id="{BCE8B2B7-BB22-459C-9648-08CD18A10457}"/>
+                <a16:creationId xmlns:a16="http://schemas.microsoft.com/office/drawing/2014/main" id="{73247703-F162-4AE1-860A-41FF27BC785A}"/>
               </a:ext>
             </a:extLst>
           </p:cNvPr>
@@ -5383,7 +5383,7 @@
     </p:spTree>
     <p:extLst>
       <p:ext uri="{BB962C8B-B14F-4D97-AF65-F5344CB8AC3E}">
-        <p14:creationId xmlns:p14="http://schemas.microsoft.com/office/powerpoint/2010/main" val="396675201"/>
+        <p14:creationId xmlns:p14="http://schemas.microsoft.com/office/powerpoint/2010/main" val="610472313"/>
       </p:ext>
     </p:extLst>
   </p:cSld>
@@ -5584,7 +5584,7 @@
           <p:cNvPr id="23" name="">
             <a:extLst xmlns:a="http://schemas.openxmlformats.org/drawingml/2006/main">
               <a:ext uri="{FF2B5EF4-FFF2-40B4-BE49-F238E27FC236}">
-                <a16:creationId xmlns:a16="http://schemas.microsoft.com/office/drawing/2014/main" id="{42D0EDFF-4600-45FD-A9CB-F062C1FA6C1A}"/>
+                <a16:creationId xmlns:a16="http://schemas.microsoft.com/office/drawing/2014/main" id="{D11967E7-7C42-4710-A940-7E6B3CEE6F78}"/>
               </a:ext>
             </a:extLst>
           </p:cNvPr>
@@ -5616,7 +5616,7 @@
           <p:cNvPr id="2" name="">
             <a:extLst xmlns:a="http://schemas.openxmlformats.org/drawingml/2006/main">
               <a:ext uri="{FF2B5EF4-FFF2-40B4-BE49-F238E27FC236}">
-                <a16:creationId xmlns:a16="http://schemas.microsoft.com/office/drawing/2014/main" id="{096243E3-04FB-49FA-8B96-72FB52421EF3}"/>
+                <a16:creationId xmlns:a16="http://schemas.microsoft.com/office/drawing/2014/main" id="{4B392FAC-8706-447F-AEF3-072651E0C41D}"/>
               </a:ext>
             </a:extLst>
           </p:cNvPr>
@@ -5673,7 +5673,7 @@
           <p:cNvPr id="3" name="">
             <a:extLst xmlns:a="http://schemas.openxmlformats.org/drawingml/2006/main">
               <a:ext uri="{FF2B5EF4-FFF2-40B4-BE49-F238E27FC236}">
-                <a16:creationId xmlns:a16="http://schemas.microsoft.com/office/drawing/2014/main" id="{BCCD2724-254A-476F-AA91-B6B75A5F6085}"/>
+                <a16:creationId xmlns:a16="http://schemas.microsoft.com/office/drawing/2014/main" id="{E711E56F-7C4D-4EF3-9654-F993798F9D49}"/>
               </a:ext>
             </a:extLst>
           </p:cNvPr>
@@ -5705,7 +5705,7 @@
           <p:cNvPr id="4" name="">
             <a:extLst xmlns:a="http://schemas.openxmlformats.org/drawingml/2006/main">
               <a:ext uri="{FF2B5EF4-FFF2-40B4-BE49-F238E27FC236}">
-                <a16:creationId xmlns:a16="http://schemas.microsoft.com/office/drawing/2014/main" id="{D4DECBA4-5BA5-4EE1-8FBB-2A12FAE4D75F}"/>
+                <a16:creationId xmlns:a16="http://schemas.microsoft.com/office/drawing/2014/main" id="{C3F23051-8A9A-4CB1-B1B5-EA61B1747F84}"/>
               </a:ext>
             </a:extLst>
           </p:cNvPr>
@@ -5762,7 +5762,7 @@
           <p:cNvPr id="5" name="">
             <a:extLst xmlns:a="http://schemas.openxmlformats.org/drawingml/2006/main">
               <a:ext uri="{FF2B5EF4-FFF2-40B4-BE49-F238E27FC236}">
-                <a16:creationId xmlns:a16="http://schemas.microsoft.com/office/drawing/2014/main" id="{0BFBF398-F51E-417E-A9DC-56782134FD64}"/>
+                <a16:creationId xmlns:a16="http://schemas.microsoft.com/office/drawing/2014/main" id="{A0F2B37E-70F8-4D42-BBAF-74A6D9CDB20F}"/>
               </a:ext>
             </a:extLst>
           </p:cNvPr>
@@ -5819,7 +5819,7 @@
           <p:cNvPr id="6" name="">
             <a:extLst xmlns:a="http://schemas.openxmlformats.org/drawingml/2006/main">
               <a:ext uri="{FF2B5EF4-FFF2-40B4-BE49-F238E27FC236}">
-                <a16:creationId xmlns:a16="http://schemas.microsoft.com/office/drawing/2014/main" id="{B3F8FB8C-A40C-43B1-A298-D96CA66DFF8E}"/>
+                <a16:creationId xmlns:a16="http://schemas.microsoft.com/office/drawing/2014/main" id="{92583596-49DD-4222-83CE-BC70F474C101}"/>
               </a:ext>
             </a:extLst>
           </p:cNvPr>
@@ -5876,7 +5876,7 @@
           <p:cNvPr id="7" name="">
             <a:extLst xmlns:a="http://schemas.openxmlformats.org/drawingml/2006/main">
               <a:ext uri="{FF2B5EF4-FFF2-40B4-BE49-F238E27FC236}">
-                <a16:creationId xmlns:a16="http://schemas.microsoft.com/office/drawing/2014/main" id="{5357C461-9728-44BA-AC43-3E7C0826A594}"/>
+                <a16:creationId xmlns:a16="http://schemas.microsoft.com/office/drawing/2014/main" id="{7200DB78-98D1-4604-9556-03A334CEF8A7}"/>
               </a:ext>
             </a:extLst>
           </p:cNvPr>
@@ -5908,7 +5908,7 @@
           <p:cNvPr id="8" name="">
             <a:extLst xmlns:a="http://schemas.openxmlformats.org/drawingml/2006/main">
               <a:ext uri="{FF2B5EF4-FFF2-40B4-BE49-F238E27FC236}">
-                <a16:creationId xmlns:a16="http://schemas.microsoft.com/office/drawing/2014/main" id="{20B36692-57F1-4786-B99D-2EDEF758141C}"/>
+                <a16:creationId xmlns:a16="http://schemas.microsoft.com/office/drawing/2014/main" id="{21DC4B5C-7F51-4633-B7EA-D47B4E8B0915}"/>
               </a:ext>
             </a:extLst>
           </p:cNvPr>
@@ -5965,7 +5965,7 @@
           <p:cNvPr id="9" name="">
             <a:extLst xmlns:a="http://schemas.openxmlformats.org/drawingml/2006/main">
               <a:ext uri="{FF2B5EF4-FFF2-40B4-BE49-F238E27FC236}">
-                <a16:creationId xmlns:a16="http://schemas.microsoft.com/office/drawing/2014/main" id="{DF19DC4C-30CE-45A9-A34D-30C75F697D9C}"/>
+                <a16:creationId xmlns:a16="http://schemas.microsoft.com/office/drawing/2014/main" id="{7E7517B5-0987-4AE3-82BB-235B25AB721E}"/>
               </a:ext>
             </a:extLst>
           </p:cNvPr>
@@ -6022,7 +6022,7 @@
           <p:cNvPr id="10" name="">
             <a:extLst xmlns:a="http://schemas.openxmlformats.org/drawingml/2006/main">
               <a:ext uri="{FF2B5EF4-FFF2-40B4-BE49-F238E27FC236}">
-                <a16:creationId xmlns:a16="http://schemas.microsoft.com/office/drawing/2014/main" id="{19FCE363-F39E-4ECC-B5A6-0A0DF634869E}"/>
+                <a16:creationId xmlns:a16="http://schemas.microsoft.com/office/drawing/2014/main" id="{EC5DAF72-B045-415A-9B7E-092AC7760A45}"/>
               </a:ext>
             </a:extLst>
           </p:cNvPr>
@@ -6056,7 +6056,7 @@
           <p:cNvPr id="11" name="">
             <a:extLst xmlns:a="http://schemas.openxmlformats.org/drawingml/2006/main">
               <a:ext uri="{FF2B5EF4-FFF2-40B4-BE49-F238E27FC236}">
-                <a16:creationId xmlns:a16="http://schemas.microsoft.com/office/drawing/2014/main" id="{6D341AB5-2C57-492A-8782-E595138CB5B6}"/>
+                <a16:creationId xmlns:a16="http://schemas.microsoft.com/office/drawing/2014/main" id="{72107482-A58C-4F5B-B2C3-C90ACE24FF09}"/>
               </a:ext>
             </a:extLst>
           </p:cNvPr>
@@ -6088,7 +6088,7 @@
           <p:cNvPr id="12" name="">
             <a:extLst xmlns:a="http://schemas.openxmlformats.org/drawingml/2006/main">
               <a:ext uri="{FF2B5EF4-FFF2-40B4-BE49-F238E27FC236}">
-                <a16:creationId xmlns:a16="http://schemas.microsoft.com/office/drawing/2014/main" id="{B149AA5E-58DE-4D29-AA25-5DB00B9EAC86}"/>
+                <a16:creationId xmlns:a16="http://schemas.microsoft.com/office/drawing/2014/main" id="{21CA1AD7-DD19-40D7-A3B6-C48FF6E53767}"/>
               </a:ext>
             </a:extLst>
           </p:cNvPr>
@@ -6145,7 +6145,7 @@
           <p:cNvPr id="13" name="">
             <a:extLst xmlns:a="http://schemas.openxmlformats.org/drawingml/2006/main">
               <a:ext uri="{FF2B5EF4-FFF2-40B4-BE49-F238E27FC236}">
-                <a16:creationId xmlns:a16="http://schemas.microsoft.com/office/drawing/2014/main" id="{AC9B3F46-EE18-4793-882C-DEA7DCB86CBD}"/>
+                <a16:creationId xmlns:a16="http://schemas.microsoft.com/office/drawing/2014/main" id="{0E6316E4-ECFD-417E-9984-ABC25E3E7DC2}"/>
               </a:ext>
             </a:extLst>
           </p:cNvPr>
@@ -6202,7 +6202,7 @@
           <p:cNvPr id="14" name="">
             <a:extLst xmlns:a="http://schemas.openxmlformats.org/drawingml/2006/main">
               <a:ext uri="{FF2B5EF4-FFF2-40B4-BE49-F238E27FC236}">
-                <a16:creationId xmlns:a16="http://schemas.microsoft.com/office/drawing/2014/main" id="{0F9F69CC-DA2C-4B85-890B-1AE9EA5D7485}"/>
+                <a16:creationId xmlns:a16="http://schemas.microsoft.com/office/drawing/2014/main" id="{83143E4A-5539-40EC-B1E6-EAC78D7B8125}"/>
               </a:ext>
             </a:extLst>
           </p:cNvPr>
@@ -6236,7 +6236,7 @@
           <p:cNvPr id="15" name="">
             <a:extLst xmlns:a="http://schemas.openxmlformats.org/drawingml/2006/main">
               <a:ext uri="{FF2B5EF4-FFF2-40B4-BE49-F238E27FC236}">
-                <a16:creationId xmlns:a16="http://schemas.microsoft.com/office/drawing/2014/main" id="{1CF600A7-E5A7-4721-AABC-BF8D1CE61CB9}"/>
+                <a16:creationId xmlns:a16="http://schemas.microsoft.com/office/drawing/2014/main" id="{CE5DF8F1-603D-4CF1-9DB8-A88C95E9E180}"/>
               </a:ext>
             </a:extLst>
           </p:cNvPr>
@@ -6268,7 +6268,7 @@
           <p:cNvPr id="16" name="">
             <a:extLst xmlns:a="http://schemas.openxmlformats.org/drawingml/2006/main">
               <a:ext uri="{FF2B5EF4-FFF2-40B4-BE49-F238E27FC236}">
-                <a16:creationId xmlns:a16="http://schemas.microsoft.com/office/drawing/2014/main" id="{85336A63-D2E3-42ED-AD98-DBDAB9492395}"/>
+                <a16:creationId xmlns:a16="http://schemas.microsoft.com/office/drawing/2014/main" id="{1C680AC0-E68F-48F9-ADE1-AA8ABB1A66B2}"/>
               </a:ext>
             </a:extLst>
           </p:cNvPr>
@@ -6325,7 +6325,7 @@
           <p:cNvPr id="17" name="">
             <a:extLst xmlns:a="http://schemas.openxmlformats.org/drawingml/2006/main">
               <a:ext uri="{FF2B5EF4-FFF2-40B4-BE49-F238E27FC236}">
-                <a16:creationId xmlns:a16="http://schemas.microsoft.com/office/drawing/2014/main" id="{97A28293-80A2-44E8-8EBD-241547D0C282}"/>
+                <a16:creationId xmlns:a16="http://schemas.microsoft.com/office/drawing/2014/main" id="{2A82B35B-40C2-420B-99B4-2A6EA3409764}"/>
               </a:ext>
             </a:extLst>
           </p:cNvPr>
@@ -6382,7 +6382,7 @@
           <p:cNvPr id="18" name="">
             <a:extLst xmlns:a="http://schemas.openxmlformats.org/drawingml/2006/main">
               <a:ext uri="{FF2B5EF4-FFF2-40B4-BE49-F238E27FC236}">
-                <a16:creationId xmlns:a16="http://schemas.microsoft.com/office/drawing/2014/main" id="{26CD2CE0-AFA9-4C10-A429-78DE2FDDEA10}"/>
+                <a16:creationId xmlns:a16="http://schemas.microsoft.com/office/drawing/2014/main" id="{80C7B5A5-2AD6-4547-BE1C-C40EBDC1A2FF}"/>
               </a:ext>
             </a:extLst>
           </p:cNvPr>
@@ -6416,7 +6416,7 @@
           <p:cNvPr id="19" name="">
             <a:extLst xmlns:a="http://schemas.openxmlformats.org/drawingml/2006/main">
               <a:ext uri="{FF2B5EF4-FFF2-40B4-BE49-F238E27FC236}">
-                <a16:creationId xmlns:a16="http://schemas.microsoft.com/office/drawing/2014/main" id="{3546E3DE-AAF7-4C3B-99CC-ED6F3D943843}"/>
+                <a16:creationId xmlns:a16="http://schemas.microsoft.com/office/drawing/2014/main" id="{02D8DC76-8FE8-4F19-9527-DDE802C4F7A0}"/>
               </a:ext>
             </a:extLst>
           </p:cNvPr>
@@ -6448,7 +6448,7 @@
           <p:cNvPr id="20" name="">
             <a:extLst xmlns:a="http://schemas.openxmlformats.org/drawingml/2006/main">
               <a:ext uri="{FF2B5EF4-FFF2-40B4-BE49-F238E27FC236}">
-                <a16:creationId xmlns:a16="http://schemas.microsoft.com/office/drawing/2014/main" id="{3F2D5EA1-5077-49CA-8D0C-575E1EAD2C90}"/>
+                <a16:creationId xmlns:a16="http://schemas.microsoft.com/office/drawing/2014/main" id="{342D98B9-672B-47EA-A145-02229B362BCE}"/>
               </a:ext>
             </a:extLst>
           </p:cNvPr>
@@ -6505,7 +6505,7 @@
           <p:cNvPr id="21" name="">
             <a:extLst xmlns:a="http://schemas.openxmlformats.org/drawingml/2006/main">
               <a:ext uri="{FF2B5EF4-FFF2-40B4-BE49-F238E27FC236}">
-                <a16:creationId xmlns:a16="http://schemas.microsoft.com/office/drawing/2014/main" id="{0536BE50-9D97-45BD-84DA-C20A600FC4BD}"/>
+                <a16:creationId xmlns:a16="http://schemas.microsoft.com/office/drawing/2014/main" id="{9C8357C5-77D2-42F4-847E-4275A167640C}"/>
               </a:ext>
             </a:extLst>
           </p:cNvPr>
@@ -6562,7 +6562,7 @@
           <p:cNvPr id="22" name="">
             <a:extLst xmlns:a="http://schemas.openxmlformats.org/drawingml/2006/main">
               <a:ext uri="{FF2B5EF4-FFF2-40B4-BE49-F238E27FC236}">
-                <a16:creationId xmlns:a16="http://schemas.microsoft.com/office/drawing/2014/main" id="{CE418FA6-EAC9-4AA9-8A9F-0A34D1858C00}"/>
+                <a16:creationId xmlns:a16="http://schemas.microsoft.com/office/drawing/2014/main" id="{EAFC3415-ACB7-4494-896B-525E5104E158}"/>
               </a:ext>
             </a:extLst>
           </p:cNvPr>
@@ -6617,7 +6617,7 @@
     </p:spTree>
     <p:extLst>
       <p:ext uri="{BB962C8B-B14F-4D97-AF65-F5344CB8AC3E}">
-        <p14:creationId xmlns:p14="http://schemas.microsoft.com/office/powerpoint/2010/main" val="944174131"/>
+        <p14:creationId xmlns:p14="http://schemas.microsoft.com/office/powerpoint/2010/main" val="238839333"/>
       </p:ext>
     </p:extLst>
   </p:cSld>
@@ -6818,7 +6818,7 @@
           <p:cNvPr id="16" name="">
             <a:extLst xmlns:a="http://schemas.openxmlformats.org/drawingml/2006/main">
               <a:ext uri="{FF2B5EF4-FFF2-40B4-BE49-F238E27FC236}">
-                <a16:creationId xmlns:a16="http://schemas.microsoft.com/office/drawing/2014/main" id="{78FCFF9E-74F7-4317-B147-997BADAC03D0}"/>
+                <a16:creationId xmlns:a16="http://schemas.microsoft.com/office/drawing/2014/main" id="{7798C30F-C121-4E53-A98E-8B9F26AE2425}"/>
               </a:ext>
             </a:extLst>
           </p:cNvPr>
@@ -6850,7 +6850,7 @@
           <p:cNvPr id="2" name="">
             <a:extLst xmlns:a="http://schemas.openxmlformats.org/drawingml/2006/main">
               <a:ext uri="{FF2B5EF4-FFF2-40B4-BE49-F238E27FC236}">
-                <a16:creationId xmlns:a16="http://schemas.microsoft.com/office/drawing/2014/main" id="{557E0741-2425-4D60-9758-038329FCB251}"/>
+                <a16:creationId xmlns:a16="http://schemas.microsoft.com/office/drawing/2014/main" id="{FF1CCCBA-E53B-4DFB-B9FF-99D41A02043E}"/>
               </a:ext>
             </a:extLst>
           </p:cNvPr>
@@ -6907,7 +6907,7 @@
           <p:cNvPr id="3" name="">
             <a:extLst xmlns:a="http://schemas.openxmlformats.org/drawingml/2006/main">
               <a:ext uri="{FF2B5EF4-FFF2-40B4-BE49-F238E27FC236}">
-                <a16:creationId xmlns:a16="http://schemas.microsoft.com/office/drawing/2014/main" id="{B5E2E340-0597-4BD3-8A63-FB00947ACC5F}"/>
+                <a16:creationId xmlns:a16="http://schemas.microsoft.com/office/drawing/2014/main" id="{625177AB-6226-416A-9A1D-54A8A99CF3D4}"/>
               </a:ext>
             </a:extLst>
           </p:cNvPr>
@@ -6939,7 +6939,7 @@
           <p:cNvPr id="4" name="">
             <a:extLst xmlns:a="http://schemas.openxmlformats.org/drawingml/2006/main">
               <a:ext uri="{FF2B5EF4-FFF2-40B4-BE49-F238E27FC236}">
-                <a16:creationId xmlns:a16="http://schemas.microsoft.com/office/drawing/2014/main" id="{F28224D1-E307-40DF-836A-7B84DD44212B}"/>
+                <a16:creationId xmlns:a16="http://schemas.microsoft.com/office/drawing/2014/main" id="{AFCAD542-903E-43D0-B74D-10F6E736A918}"/>
               </a:ext>
             </a:extLst>
           </p:cNvPr>
@@ -6996,7 +6996,7 @@
           <p:cNvPr id="5" name="">
             <a:extLst xmlns:a="http://schemas.openxmlformats.org/drawingml/2006/main">
               <a:ext uri="{FF2B5EF4-FFF2-40B4-BE49-F238E27FC236}">
-                <a16:creationId xmlns:a16="http://schemas.microsoft.com/office/drawing/2014/main" id="{6CF90316-4064-4FCF-9922-4AE7EA506F62}"/>
+                <a16:creationId xmlns:a16="http://schemas.microsoft.com/office/drawing/2014/main" id="{5B87EC25-5DC3-4613-8216-25D84683B244}"/>
               </a:ext>
             </a:extLst>
           </p:cNvPr>
@@ -7053,7 +7053,7 @@
           <p:cNvPr id="6" name="">
             <a:extLst xmlns:a="http://schemas.openxmlformats.org/drawingml/2006/main">
               <a:ext uri="{FF2B5EF4-FFF2-40B4-BE49-F238E27FC236}">
-                <a16:creationId xmlns:a16="http://schemas.microsoft.com/office/drawing/2014/main" id="{88F11B0D-59A8-40BB-B0F0-272C94F0569B}"/>
+                <a16:creationId xmlns:a16="http://schemas.microsoft.com/office/drawing/2014/main" id="{1C04E0E6-A29E-42CF-BD98-3E23B97CD254}"/>
               </a:ext>
             </a:extLst>
           </p:cNvPr>
@@ -7110,7 +7110,7 @@
           <p:cNvPr id="7" name="">
             <a:extLst xmlns:a="http://schemas.openxmlformats.org/drawingml/2006/main">
               <a:ext uri="{FF2B5EF4-FFF2-40B4-BE49-F238E27FC236}">
-                <a16:creationId xmlns:a16="http://schemas.microsoft.com/office/drawing/2014/main" id="{0FCB3435-0BA8-46B9-9BD7-97AB62AE77EA}"/>
+                <a16:creationId xmlns:a16="http://schemas.microsoft.com/office/drawing/2014/main" id="{97C7F105-6814-4B4F-B400-8A266747ACD5}"/>
               </a:ext>
             </a:extLst>
           </p:cNvPr>
@@ -7142,7 +7142,7 @@
           <p:cNvPr id="8" name="">
             <a:extLst xmlns:a="http://schemas.openxmlformats.org/drawingml/2006/main">
               <a:ext uri="{FF2B5EF4-FFF2-40B4-BE49-F238E27FC236}">
-                <a16:creationId xmlns:a16="http://schemas.microsoft.com/office/drawing/2014/main" id="{9D0D5263-9FA8-4E7C-86C8-D4FB31FF7F23}"/>
+                <a16:creationId xmlns:a16="http://schemas.microsoft.com/office/drawing/2014/main" id="{27B2C3B1-51F1-4159-9FB4-BB616A1B84A5}"/>
               </a:ext>
             </a:extLst>
           </p:cNvPr>
@@ -7199,7 +7199,7 @@
           <p:cNvPr id="9" name="">
             <a:extLst xmlns:a="http://schemas.openxmlformats.org/drawingml/2006/main">
               <a:ext uri="{FF2B5EF4-FFF2-40B4-BE49-F238E27FC236}">
-                <a16:creationId xmlns:a16="http://schemas.microsoft.com/office/drawing/2014/main" id="{29C9FE57-6AF5-4754-97B9-9C6BD28C168E}"/>
+                <a16:creationId xmlns:a16="http://schemas.microsoft.com/office/drawing/2014/main" id="{8D15E164-079F-4E9F-9DDF-267F49013488}"/>
               </a:ext>
             </a:extLst>
           </p:cNvPr>
@@ -7256,7 +7256,7 @@
           <p:cNvPr id="10" name="">
             <a:extLst xmlns:a="http://schemas.openxmlformats.org/drawingml/2006/main">
               <a:ext uri="{FF2B5EF4-FFF2-40B4-BE49-F238E27FC236}">
-                <a16:creationId xmlns:a16="http://schemas.microsoft.com/office/drawing/2014/main" id="{83BAFAC7-4870-4746-8919-DB8817C9A875}"/>
+                <a16:creationId xmlns:a16="http://schemas.microsoft.com/office/drawing/2014/main" id="{23AD40E1-61EB-4A48-AB64-B757246D7488}"/>
               </a:ext>
             </a:extLst>
           </p:cNvPr>
@@ -7313,7 +7313,7 @@
           <p:cNvPr id="11" name="">
             <a:extLst xmlns:a="http://schemas.openxmlformats.org/drawingml/2006/main">
               <a:ext uri="{FF2B5EF4-FFF2-40B4-BE49-F238E27FC236}">
-                <a16:creationId xmlns:a16="http://schemas.microsoft.com/office/drawing/2014/main" id="{B95CF83A-A048-4EF2-821E-1B6919A4306A}"/>
+                <a16:creationId xmlns:a16="http://schemas.microsoft.com/office/drawing/2014/main" id="{6BCBEEE2-653E-422A-8CDB-0986B14F4CC4}"/>
               </a:ext>
             </a:extLst>
           </p:cNvPr>
@@ -7345,7 +7345,7 @@
           <p:cNvPr id="12" name="">
             <a:extLst xmlns:a="http://schemas.openxmlformats.org/drawingml/2006/main">
               <a:ext uri="{FF2B5EF4-FFF2-40B4-BE49-F238E27FC236}">
-                <a16:creationId xmlns:a16="http://schemas.microsoft.com/office/drawing/2014/main" id="{38A90EBC-15F9-4815-B47B-84407E9BB156}"/>
+                <a16:creationId xmlns:a16="http://schemas.microsoft.com/office/drawing/2014/main" id="{C3F2381C-7BBB-416B-AFD7-ECFC21850D87}"/>
               </a:ext>
             </a:extLst>
           </p:cNvPr>
@@ -7402,7 +7402,7 @@
           <p:cNvPr id="13" name="">
             <a:extLst xmlns:a="http://schemas.openxmlformats.org/drawingml/2006/main">
               <a:ext uri="{FF2B5EF4-FFF2-40B4-BE49-F238E27FC236}">
-                <a16:creationId xmlns:a16="http://schemas.microsoft.com/office/drawing/2014/main" id="{6DD176A1-7389-42EF-959B-51784BC2298B}"/>
+                <a16:creationId xmlns:a16="http://schemas.microsoft.com/office/drawing/2014/main" id="{A319428A-38D0-46DF-9287-E494F40F6447}"/>
               </a:ext>
             </a:extLst>
           </p:cNvPr>
@@ -7459,7 +7459,7 @@
           <p:cNvPr id="14" name="">
             <a:extLst xmlns:a="http://schemas.openxmlformats.org/drawingml/2006/main">
               <a:ext uri="{FF2B5EF4-FFF2-40B4-BE49-F238E27FC236}">
-                <a16:creationId xmlns:a16="http://schemas.microsoft.com/office/drawing/2014/main" id="{9656F059-8038-42D3-BD8F-5176E3059C1A}"/>
+                <a16:creationId xmlns:a16="http://schemas.microsoft.com/office/drawing/2014/main" id="{C830B35B-BFA1-40DA-9415-AAD5E7D085EC}"/>
               </a:ext>
             </a:extLst>
           </p:cNvPr>
@@ -7516,7 +7516,7 @@
           <p:cNvPr id="15" name="">
             <a:extLst xmlns:a="http://schemas.openxmlformats.org/drawingml/2006/main">
               <a:ext uri="{FF2B5EF4-FFF2-40B4-BE49-F238E27FC236}">
-                <a16:creationId xmlns:a16="http://schemas.microsoft.com/office/drawing/2014/main" id="{8E9349BD-AF3B-40A5-9EC6-AA7929ADB67B}"/>
+                <a16:creationId xmlns:a16="http://schemas.microsoft.com/office/drawing/2014/main" id="{E1F02EFB-4983-42AE-AB58-2811C2D842EF}"/>
               </a:ext>
             </a:extLst>
           </p:cNvPr>
@@ -7571,7 +7571,7 @@
     </p:spTree>
     <p:extLst>
       <p:ext uri="{BB962C8B-B14F-4D97-AF65-F5344CB8AC3E}">
-        <p14:creationId xmlns:p14="http://schemas.microsoft.com/office/powerpoint/2010/main" val="1565611519"/>
+        <p14:creationId xmlns:p14="http://schemas.microsoft.com/office/powerpoint/2010/main" val="518008973"/>
       </p:ext>
     </p:extLst>
   </p:cSld>
@@ -7769,10 +7769,10 @@
       </p:grpSpPr>
       <p:sp>
         <p:nvSpPr>
-          <p:cNvPr id="23" name="">
-            <a:extLst xmlns:a="http://schemas.openxmlformats.org/drawingml/2006/main">
-              <a:ext uri="{FF2B5EF4-FFF2-40B4-BE49-F238E27FC236}">
-                <a16:creationId xmlns:a16="http://schemas.microsoft.com/office/drawing/2014/main" id="{BEF2CD1E-083B-463E-9109-0ADF33098821}"/>
+          <p:cNvPr id="26" name="">
+            <a:extLst xmlns:a="http://schemas.openxmlformats.org/drawingml/2006/main">
+              <a:ext uri="{FF2B5EF4-FFF2-40B4-BE49-F238E27FC236}">
+                <a16:creationId xmlns:a16="http://schemas.microsoft.com/office/drawing/2014/main" id="{1DE6AF44-8E72-46E6-A3CD-BEEC02BA8305}"/>
               </a:ext>
             </a:extLst>
           </p:cNvPr>
@@ -7804,7 +7804,7 @@
           <p:cNvPr id="2" name="">
             <a:extLst xmlns:a="http://schemas.openxmlformats.org/drawingml/2006/main">
               <a:ext uri="{FF2B5EF4-FFF2-40B4-BE49-F238E27FC236}">
-                <a16:creationId xmlns:a16="http://schemas.microsoft.com/office/drawing/2014/main" id="{B96D428C-8A2B-49D7-A3A8-0871171B82BF}"/>
+                <a16:creationId xmlns:a16="http://schemas.microsoft.com/office/drawing/2014/main" id="{F3DD1802-77C4-4519-9667-306D84AA79B2}"/>
               </a:ext>
             </a:extLst>
           </p:cNvPr>
@@ -7861,7 +7861,7 @@
           <p:cNvPr id="3" name="">
             <a:extLst xmlns:a="http://schemas.openxmlformats.org/drawingml/2006/main">
               <a:ext uri="{FF2B5EF4-FFF2-40B4-BE49-F238E27FC236}">
-                <a16:creationId xmlns:a16="http://schemas.microsoft.com/office/drawing/2014/main" id="{99D98812-7150-41E4-8022-3A6C2A135687}"/>
+                <a16:creationId xmlns:a16="http://schemas.microsoft.com/office/drawing/2014/main" id="{19CA554B-87FF-4D9F-B150-E4F5C07EBDCF}"/>
               </a:ext>
             </a:extLst>
           </p:cNvPr>
@@ -7893,7 +7893,7 @@
           <p:cNvPr id="4" name="">
             <a:extLst xmlns:a="http://schemas.openxmlformats.org/drawingml/2006/main">
               <a:ext uri="{FF2B5EF4-FFF2-40B4-BE49-F238E27FC236}">
-                <a16:creationId xmlns:a16="http://schemas.microsoft.com/office/drawing/2014/main" id="{4E38770D-444E-4322-8907-81B1E16A1480}"/>
+                <a16:creationId xmlns:a16="http://schemas.microsoft.com/office/drawing/2014/main" id="{6FD4FAEC-3A8C-4436-A4DD-2FE484FD5EEF}"/>
               </a:ext>
             </a:extLst>
           </p:cNvPr>
@@ -7950,7 +7950,7 @@
           <p:cNvPr id="5" name="">
             <a:extLst xmlns:a="http://schemas.openxmlformats.org/drawingml/2006/main">
               <a:ext uri="{FF2B5EF4-FFF2-40B4-BE49-F238E27FC236}">
-                <a16:creationId xmlns:a16="http://schemas.microsoft.com/office/drawing/2014/main" id="{A59F190F-2270-4095-AC4D-75BFAB1912CA}"/>
+                <a16:creationId xmlns:a16="http://schemas.microsoft.com/office/drawing/2014/main" id="{3F3D6792-F9F9-45EE-B997-262962019149}"/>
               </a:ext>
             </a:extLst>
           </p:cNvPr>
@@ -8007,7 +8007,7 @@
           <p:cNvPr id="6" name="">
             <a:extLst xmlns:a="http://schemas.openxmlformats.org/drawingml/2006/main">
               <a:ext uri="{FF2B5EF4-FFF2-40B4-BE49-F238E27FC236}">
-                <a16:creationId xmlns:a16="http://schemas.microsoft.com/office/drawing/2014/main" id="{86569ABC-C045-46FE-90F8-466E54F08587}"/>
+                <a16:creationId xmlns:a16="http://schemas.microsoft.com/office/drawing/2014/main" id="{792C662E-1B7F-4A56-91AB-3413C32D2AFA}"/>
               </a:ext>
             </a:extLst>
           </p:cNvPr>
@@ -8064,7 +8064,7 @@
           <p:cNvPr id="7" name="">
             <a:extLst xmlns:a="http://schemas.openxmlformats.org/drawingml/2006/main">
               <a:ext uri="{FF2B5EF4-FFF2-40B4-BE49-F238E27FC236}">
-                <a16:creationId xmlns:a16="http://schemas.microsoft.com/office/drawing/2014/main" id="{40F7528A-DA66-4723-A639-C2B2F2ABE4D8}"/>
+                <a16:creationId xmlns:a16="http://schemas.microsoft.com/office/drawing/2014/main" id="{A37F27D5-F3C6-4E7A-9D22-1C7DBCCF201A}"/>
               </a:ext>
             </a:extLst>
           </p:cNvPr>
@@ -8096,7 +8096,7 @@
           <p:cNvPr id="8" name="">
             <a:extLst xmlns:a="http://schemas.openxmlformats.org/drawingml/2006/main">
               <a:ext uri="{FF2B5EF4-FFF2-40B4-BE49-F238E27FC236}">
-                <a16:creationId xmlns:a16="http://schemas.microsoft.com/office/drawing/2014/main" id="{39DA2CBE-94F5-4216-90CD-EEF1ADEBB1FC}"/>
+                <a16:creationId xmlns:a16="http://schemas.microsoft.com/office/drawing/2014/main" id="{BF3F60AA-7F17-47E6-ADB7-16C453558437}"/>
               </a:ext>
             </a:extLst>
           </p:cNvPr>
@@ -8153,7 +8153,7 @@
           <p:cNvPr id="9" name="">
             <a:extLst xmlns:a="http://schemas.openxmlformats.org/drawingml/2006/main">
               <a:ext uri="{FF2B5EF4-FFF2-40B4-BE49-F238E27FC236}">
-                <a16:creationId xmlns:a16="http://schemas.microsoft.com/office/drawing/2014/main" id="{242D6548-9657-429F-9ACF-C2A84CD9C75E}"/>
+                <a16:creationId xmlns:a16="http://schemas.microsoft.com/office/drawing/2014/main" id="{8B694736-541B-4210-9DF1-204A1B0EFAA1}"/>
               </a:ext>
             </a:extLst>
           </p:cNvPr>
@@ -8210,19 +8210,19 @@
           <p:cNvPr id="10" name="">
             <a:extLst xmlns:a="http://schemas.openxmlformats.org/drawingml/2006/main">
               <a:ext uri="{FF2B5EF4-FFF2-40B4-BE49-F238E27FC236}">
-                <a16:creationId xmlns:a16="http://schemas.microsoft.com/office/drawing/2014/main" id="{AE8F89A0-F0A0-4BD7-88C0-D80F405C6C7E}"/>
-              </a:ext>
-            </a:extLst>
-          </p:cNvPr>
-          <p:cNvSpPr>
-            <a:spLocks xmlns:a="http://schemas.openxmlformats.org/drawingml/2006/main" noGrp="1"/>
-          </p:cNvSpPr>
-          <p:nvPr/>
-        </p:nvSpPr>
-        <p:spPr>
-          <a:xfrm xmlns:a="http://schemas.openxmlformats.org/drawingml/2006/main">
-            <a:off x="914400" y="1257300"/>
-            <a:ext cx="10363200" cy="781050"/>
+                <a16:creationId xmlns:a16="http://schemas.microsoft.com/office/drawing/2014/main" id="{2C73070C-D5F2-473A-A9AE-6F4CC28166A1}"/>
+              </a:ext>
+            </a:extLst>
+          </p:cNvPr>
+          <p:cNvSpPr>
+            <a:spLocks xmlns:a="http://schemas.openxmlformats.org/drawingml/2006/main" noGrp="1"/>
+          </p:cNvSpPr>
+          <p:nvPr/>
+        </p:nvSpPr>
+        <p:spPr>
+          <a:xfrm xmlns:a="http://schemas.openxmlformats.org/drawingml/2006/main">
+            <a:off x="857250" y="1219200"/>
+            <a:ext cx="10477500" cy="742950"/>
           </a:xfrm>
           <a:prstGeom xmlns:a="http://schemas.openxmlformats.org/drawingml/2006/main" prst="rect">
             <a:avLst/>
@@ -8239,7 +8239,7 @@
           <a:lstStyle xmlns:a="http://schemas.openxmlformats.org/drawingml/2006/main"/>
           <a:p xmlns:a="http://schemas.openxmlformats.org/drawingml/2006/main">
             <a:pPr algn="ctr">
-              <a:defRPr sz="2175" b="1">
+              <a:defRPr sz="2100" b="1">
                 <a:solidFill>
                   <a:srgbClr val="17253A"/>
                 </a:solidFill>
@@ -8249,7 +8249,7 @@
               </a:defRPr>
             </a:pPr>
             <a:r>
-              <a:rPr sz="2175" b="1">
+              <a:rPr sz="2100" b="1">
                 <a:solidFill>
                   <a:srgbClr val="17253A"/>
                 </a:solidFill>
@@ -8267,28 +8267,30 @@
           <p:cNvPr id="11" name="">
             <a:extLst xmlns:a="http://schemas.openxmlformats.org/drawingml/2006/main">
               <a:ext uri="{FF2B5EF4-FFF2-40B4-BE49-F238E27FC236}">
-                <a16:creationId xmlns:a16="http://schemas.microsoft.com/office/drawing/2014/main" id="{B859C146-DBA8-471C-A5FF-DD7BB2437D3C}"/>
-              </a:ext>
-            </a:extLst>
-          </p:cNvPr>
-          <p:cNvSpPr>
-            <a:spLocks xmlns:a="http://schemas.openxmlformats.org/drawingml/2006/main" noGrp="1"/>
-          </p:cNvSpPr>
-          <p:nvPr/>
-        </p:nvSpPr>
-        <p:spPr>
-          <a:xfrm xmlns:a="http://schemas.openxmlformats.org/drawingml/2006/main">
-            <a:off x="1000125" y="2247900"/>
-            <a:ext cx="476250" cy="476250"/>
-          </a:xfrm>
-          <a:prstGeom xmlns:a="http://schemas.openxmlformats.org/drawingml/2006/main" prst="ellipse">
+                <a16:creationId xmlns:a16="http://schemas.microsoft.com/office/drawing/2014/main" id="{4F0986DA-408D-43EC-BD97-2F321B60957F}"/>
+              </a:ext>
+            </a:extLst>
+          </p:cNvPr>
+          <p:cNvSpPr>
+            <a:spLocks xmlns:a="http://schemas.openxmlformats.org/drawingml/2006/main" noGrp="1"/>
+          </p:cNvSpPr>
+          <p:nvPr/>
+        </p:nvSpPr>
+        <p:spPr>
+          <a:xfrm xmlns:a="http://schemas.openxmlformats.org/drawingml/2006/main">
+            <a:off x="971550" y="2124075"/>
+            <a:ext cx="38100" cy="3524250"/>
+          </a:xfrm>
+          <a:prstGeom xmlns:a="http://schemas.openxmlformats.org/drawingml/2006/main" prst="rect">
             <a:avLst/>
           </a:prstGeom>
           <a:solidFill xmlns:a="http://schemas.openxmlformats.org/drawingml/2006/main">
-            <a:srgbClr val="18324A"/>
+            <a:srgbClr val="2C6E73"/>
           </a:solidFill>
           <a:ln xmlns:a="http://schemas.openxmlformats.org/drawingml/2006/main" w="0">
-            <a:noFill/>
+            <a:solidFill>
+              <a:srgbClr val="2C6E73"/>
+            </a:solidFill>
           </a:ln>
         </p:spPr>
       </p:sp>
@@ -8297,19 +8299,19 @@
           <p:cNvPr id="12" name="">
             <a:extLst xmlns:a="http://schemas.openxmlformats.org/drawingml/2006/main">
               <a:ext uri="{FF2B5EF4-FFF2-40B4-BE49-F238E27FC236}">
-                <a16:creationId xmlns:a16="http://schemas.microsoft.com/office/drawing/2014/main" id="{0693E533-1A96-4F80-8EBE-FE895523A662}"/>
-              </a:ext>
-            </a:extLst>
-          </p:cNvPr>
-          <p:cNvSpPr>
-            <a:spLocks xmlns:a="http://schemas.openxmlformats.org/drawingml/2006/main" noGrp="1"/>
-          </p:cNvSpPr>
-          <p:nvPr/>
-        </p:nvSpPr>
-        <p:spPr>
-          <a:xfrm xmlns:a="http://schemas.openxmlformats.org/drawingml/2006/main">
-            <a:off x="1000125" y="2276475"/>
-            <a:ext cx="476250" cy="419100"/>
+                <a16:creationId xmlns:a16="http://schemas.microsoft.com/office/drawing/2014/main" id="{C91DFB8C-5CE2-451F-92F7-88F31E50F934}"/>
+              </a:ext>
+            </a:extLst>
+          </p:cNvPr>
+          <p:cNvSpPr>
+            <a:spLocks xmlns:a="http://schemas.openxmlformats.org/drawingml/2006/main" noGrp="1"/>
+          </p:cNvSpPr>
+          <p:nvPr/>
+        </p:nvSpPr>
+        <p:spPr>
+          <a:xfrm xmlns:a="http://schemas.openxmlformats.org/drawingml/2006/main">
+            <a:off x="1162050" y="2200275"/>
+            <a:ext cx="400050" cy="400050"/>
           </a:xfrm>
           <a:prstGeom xmlns:a="http://schemas.openxmlformats.org/drawingml/2006/main" prst="rect">
             <a:avLst/>
@@ -8326,9 +8328,9 @@
           <a:lstStyle xmlns:a="http://schemas.openxmlformats.org/drawingml/2006/main"/>
           <a:p xmlns:a="http://schemas.openxmlformats.org/drawingml/2006/main">
             <a:pPr algn="ctr">
-              <a:defRPr sz="1350" b="1">
-                <a:solidFill>
-                  <a:srgbClr val="FFFFFF"/>
+              <a:defRPr sz="1125" b="1">
+                <a:solidFill>
+                  <a:srgbClr val="2C6E73"/>
                 </a:solidFill>
                 <a:latin typeface="Arial"/>
                 <a:ea typeface="Arial"/>
@@ -8336,9 +8338,9 @@
               </a:defRPr>
             </a:pPr>
             <a:r>
-              <a:rPr sz="1350" b="1">
-                <a:solidFill>
-                  <a:srgbClr val="FFFFFF"/>
+              <a:rPr sz="1125" b="1">
+                <a:solidFill>
+                  <a:srgbClr val="2C6E73"/>
                 </a:solidFill>
                 <a:latin typeface="Arial"/>
                 <a:ea typeface="Arial"/>
@@ -8354,19 +8356,19 @@
           <p:cNvPr id="13" name="">
             <a:extLst xmlns:a="http://schemas.openxmlformats.org/drawingml/2006/main">
               <a:ext uri="{FF2B5EF4-FFF2-40B4-BE49-F238E27FC236}">
-                <a16:creationId xmlns:a16="http://schemas.microsoft.com/office/drawing/2014/main" id="{FA586005-902F-4D6C-BF54-B587A3841FD1}"/>
-              </a:ext>
-            </a:extLst>
-          </p:cNvPr>
-          <p:cNvSpPr>
-            <a:spLocks xmlns:a="http://schemas.openxmlformats.org/drawingml/2006/main" noGrp="1"/>
-          </p:cNvSpPr>
-          <p:nvPr/>
-        </p:nvSpPr>
-        <p:spPr>
-          <a:xfrm xmlns:a="http://schemas.openxmlformats.org/drawingml/2006/main">
-            <a:off x="1714500" y="2181225"/>
-            <a:ext cx="9429750" cy="609600"/>
+                <a16:creationId xmlns:a16="http://schemas.microsoft.com/office/drawing/2014/main" id="{12B455BC-10C7-41D3-B798-D2A009F368F1}"/>
+              </a:ext>
+            </a:extLst>
+          </p:cNvPr>
+          <p:cNvSpPr>
+            <a:spLocks xmlns:a="http://schemas.openxmlformats.org/drawingml/2006/main" noGrp="1"/>
+          </p:cNvSpPr>
+          <p:nvPr/>
+        </p:nvSpPr>
+        <p:spPr>
+          <a:xfrm xmlns:a="http://schemas.openxmlformats.org/drawingml/2006/main">
+            <a:off x="1714500" y="2114550"/>
+            <a:ext cx="9525000" cy="638175"/>
           </a:xfrm>
           <a:prstGeom xmlns:a="http://schemas.openxmlformats.org/drawingml/2006/main" prst="rect">
             <a:avLst/>
@@ -8383,7 +8385,7 @@
           <a:lstStyle xmlns:a="http://schemas.openxmlformats.org/drawingml/2006/main"/>
           <a:p xmlns:a="http://schemas.openxmlformats.org/drawingml/2006/main">
             <a:pPr algn="l">
-              <a:defRPr sz="1500" b="0">
+              <a:defRPr sz="1575" b="0">
                 <a:solidFill>
                   <a:srgbClr val="17253A"/>
                 </a:solidFill>
@@ -8393,7 +8395,7 @@
               </a:defRPr>
             </a:pPr>
             <a:r>
-              <a:rPr sz="1500" b="0">
+              <a:rPr sz="1575" b="0">
                 <a:solidFill>
                   <a:srgbClr val="17253A"/>
                 </a:solidFill>
@@ -8401,7 +8403,7 @@
                 <a:ea typeface="Arial"/>
                 <a:cs typeface="Arial"/>
               </a:rPr>
-              <a:t>Identify the structure: Identify which quantities the ratio compares and keep their order.</a:t>
+              <a:t>7 : 4 = 28 : ?</a:t>
             </a:r>
           </a:p>
         </p:txBody>
@@ -8411,28 +8413,30 @@
           <p:cNvPr id="14" name="">
             <a:extLst xmlns:a="http://schemas.openxmlformats.org/drawingml/2006/main">
               <a:ext uri="{FF2B5EF4-FFF2-40B4-BE49-F238E27FC236}">
-                <a16:creationId xmlns:a16="http://schemas.microsoft.com/office/drawing/2014/main" id="{CBF33062-47C4-49E8-9258-6C53EC475BFF}"/>
-              </a:ext>
-            </a:extLst>
-          </p:cNvPr>
-          <p:cNvSpPr>
-            <a:spLocks xmlns:a="http://schemas.openxmlformats.org/drawingml/2006/main" noGrp="1"/>
-          </p:cNvSpPr>
-          <p:nvPr/>
-        </p:nvSpPr>
-        <p:spPr>
-          <a:xfrm xmlns:a="http://schemas.openxmlformats.org/drawingml/2006/main">
-            <a:off x="1000125" y="2990850"/>
-            <a:ext cx="476250" cy="476250"/>
-          </a:xfrm>
-          <a:prstGeom xmlns:a="http://schemas.openxmlformats.org/drawingml/2006/main" prst="ellipse">
+                <a16:creationId xmlns:a16="http://schemas.microsoft.com/office/drawing/2014/main" id="{3B012A76-FE12-422D-B33D-4A44FB74BFAA}"/>
+              </a:ext>
+            </a:extLst>
+          </p:cNvPr>
+          <p:cNvSpPr>
+            <a:spLocks xmlns:a="http://schemas.openxmlformats.org/drawingml/2006/main" noGrp="1"/>
+          </p:cNvSpPr>
+          <p:nvPr/>
+        </p:nvSpPr>
+        <p:spPr>
+          <a:xfrm xmlns:a="http://schemas.openxmlformats.org/drawingml/2006/main">
+            <a:off x="1714500" y="2771775"/>
+            <a:ext cx="9334500" cy="9525"/>
+          </a:xfrm>
+          <a:prstGeom xmlns:a="http://schemas.openxmlformats.org/drawingml/2006/main" prst="rect">
             <a:avLst/>
           </a:prstGeom>
           <a:solidFill xmlns:a="http://schemas.openxmlformats.org/drawingml/2006/main">
-            <a:srgbClr val="2C6E73"/>
+            <a:srgbClr val="D9E0E6"/>
           </a:solidFill>
           <a:ln xmlns:a="http://schemas.openxmlformats.org/drawingml/2006/main" w="0">
-            <a:noFill/>
+            <a:solidFill>
+              <a:srgbClr val="D9E0E6"/>
+            </a:solidFill>
           </a:ln>
         </p:spPr>
       </p:sp>
@@ -8441,19 +8445,19 @@
           <p:cNvPr id="15" name="">
             <a:extLst xmlns:a="http://schemas.openxmlformats.org/drawingml/2006/main">
               <a:ext uri="{FF2B5EF4-FFF2-40B4-BE49-F238E27FC236}">
-                <a16:creationId xmlns:a16="http://schemas.microsoft.com/office/drawing/2014/main" id="{7AB80C45-5656-4E2D-A3A7-9F4EA6845A91}"/>
-              </a:ext>
-            </a:extLst>
-          </p:cNvPr>
-          <p:cNvSpPr>
-            <a:spLocks xmlns:a="http://schemas.openxmlformats.org/drawingml/2006/main" noGrp="1"/>
-          </p:cNvSpPr>
-          <p:nvPr/>
-        </p:nvSpPr>
-        <p:spPr>
-          <a:xfrm xmlns:a="http://schemas.openxmlformats.org/drawingml/2006/main">
-            <a:off x="1000125" y="3019425"/>
-            <a:ext cx="476250" cy="419100"/>
+                <a16:creationId xmlns:a16="http://schemas.microsoft.com/office/drawing/2014/main" id="{15E02009-CA5D-435C-920E-1B5B55A890DF}"/>
+              </a:ext>
+            </a:extLst>
+          </p:cNvPr>
+          <p:cNvSpPr>
+            <a:spLocks xmlns:a="http://schemas.openxmlformats.org/drawingml/2006/main" noGrp="1"/>
+          </p:cNvSpPr>
+          <p:nvPr/>
+        </p:nvSpPr>
+        <p:spPr>
+          <a:xfrm xmlns:a="http://schemas.openxmlformats.org/drawingml/2006/main">
+            <a:off x="1162050" y="2905125"/>
+            <a:ext cx="400050" cy="400050"/>
           </a:xfrm>
           <a:prstGeom xmlns:a="http://schemas.openxmlformats.org/drawingml/2006/main" prst="rect">
             <a:avLst/>
@@ -8470,9 +8474,9 @@
           <a:lstStyle xmlns:a="http://schemas.openxmlformats.org/drawingml/2006/main"/>
           <a:p xmlns:a="http://schemas.openxmlformats.org/drawingml/2006/main">
             <a:pPr algn="ctr">
-              <a:defRPr sz="1350" b="1">
-                <a:solidFill>
-                  <a:srgbClr val="FFFFFF"/>
+              <a:defRPr sz="1125" b="1">
+                <a:solidFill>
+                  <a:srgbClr val="2C6E73"/>
                 </a:solidFill>
                 <a:latin typeface="Arial"/>
                 <a:ea typeface="Arial"/>
@@ -8480,9 +8484,9 @@
               </a:defRPr>
             </a:pPr>
             <a:r>
-              <a:rPr sz="1350" b="1">
-                <a:solidFill>
-                  <a:srgbClr val="FFFFFF"/>
+              <a:rPr sz="1125" b="1">
+                <a:solidFill>
+                  <a:srgbClr val="2C6E73"/>
                 </a:solidFill>
                 <a:latin typeface="Arial"/>
                 <a:ea typeface="Arial"/>
@@ -8498,19 +8502,19 @@
           <p:cNvPr id="16" name="">
             <a:extLst xmlns:a="http://schemas.openxmlformats.org/drawingml/2006/main">
               <a:ext uri="{FF2B5EF4-FFF2-40B4-BE49-F238E27FC236}">
-                <a16:creationId xmlns:a16="http://schemas.microsoft.com/office/drawing/2014/main" id="{8E65A6A3-284C-4471-8DEA-557CBC002785}"/>
-              </a:ext>
-            </a:extLst>
-          </p:cNvPr>
-          <p:cNvSpPr>
-            <a:spLocks xmlns:a="http://schemas.openxmlformats.org/drawingml/2006/main" noGrp="1"/>
-          </p:cNvSpPr>
-          <p:nvPr/>
-        </p:nvSpPr>
-        <p:spPr>
-          <a:xfrm xmlns:a="http://schemas.openxmlformats.org/drawingml/2006/main">
-            <a:off x="1714500" y="2924175"/>
-            <a:ext cx="9429750" cy="609600"/>
+                <a16:creationId xmlns:a16="http://schemas.microsoft.com/office/drawing/2014/main" id="{D2F2A2C3-A142-4BBB-9DE1-659A01BF1C53}"/>
+              </a:ext>
+            </a:extLst>
+          </p:cNvPr>
+          <p:cNvSpPr>
+            <a:spLocks xmlns:a="http://schemas.openxmlformats.org/drawingml/2006/main" noGrp="1"/>
+          </p:cNvSpPr>
+          <p:nvPr/>
+        </p:nvSpPr>
+        <p:spPr>
+          <a:xfrm xmlns:a="http://schemas.openxmlformats.org/drawingml/2006/main">
+            <a:off x="1714500" y="2819400"/>
+            <a:ext cx="9525000" cy="638175"/>
           </a:xfrm>
           <a:prstGeom xmlns:a="http://schemas.openxmlformats.org/drawingml/2006/main" prst="rect">
             <a:avLst/>
@@ -8527,7 +8531,7 @@
           <a:lstStyle xmlns:a="http://schemas.openxmlformats.org/drawingml/2006/main"/>
           <a:p xmlns:a="http://schemas.openxmlformats.org/drawingml/2006/main">
             <a:pPr algn="l">
-              <a:defRPr sz="1500" b="0">
+              <a:defRPr sz="1575" b="0">
                 <a:solidFill>
                   <a:srgbClr val="17253A"/>
                 </a:solidFill>
@@ -8537,7 +8541,7 @@
               </a:defRPr>
             </a:pPr>
             <a:r>
-              <a:rPr sz="1500" b="0">
+              <a:rPr sz="1575" b="0">
                 <a:solidFill>
                   <a:srgbClr val="17253A"/>
                 </a:solidFill>
@@ -8545,7 +8549,7 @@
                 <a:ea typeface="Arial"/>
                 <a:cs typeface="Arial"/>
               </a:rPr>
-              <a:t>Set up the method: Scale both parts by the same factor.</a:t>
+              <a:t>7 × 4 = 28</a:t>
             </a:r>
           </a:p>
         </p:txBody>
@@ -8555,28 +8559,30 @@
           <p:cNvPr id="17" name="">
             <a:extLst xmlns:a="http://schemas.openxmlformats.org/drawingml/2006/main">
               <a:ext uri="{FF2B5EF4-FFF2-40B4-BE49-F238E27FC236}">
-                <a16:creationId xmlns:a16="http://schemas.microsoft.com/office/drawing/2014/main" id="{96F8D4C1-06AD-4084-84BA-4776BBFC9D58}"/>
-              </a:ext>
-            </a:extLst>
-          </p:cNvPr>
-          <p:cNvSpPr>
-            <a:spLocks xmlns:a="http://schemas.openxmlformats.org/drawingml/2006/main" noGrp="1"/>
-          </p:cNvSpPr>
-          <p:nvPr/>
-        </p:nvSpPr>
-        <p:spPr>
-          <a:xfrm xmlns:a="http://schemas.openxmlformats.org/drawingml/2006/main">
-            <a:off x="1000125" y="3733800"/>
-            <a:ext cx="476250" cy="476250"/>
-          </a:xfrm>
-          <a:prstGeom xmlns:a="http://schemas.openxmlformats.org/drawingml/2006/main" prst="ellipse">
+                <a16:creationId xmlns:a16="http://schemas.microsoft.com/office/drawing/2014/main" id="{72F477C5-6155-4B74-A0C9-4F17C5B3BD99}"/>
+              </a:ext>
+            </a:extLst>
+          </p:cNvPr>
+          <p:cNvSpPr>
+            <a:spLocks xmlns:a="http://schemas.openxmlformats.org/drawingml/2006/main" noGrp="1"/>
+          </p:cNvSpPr>
+          <p:nvPr/>
+        </p:nvSpPr>
+        <p:spPr>
+          <a:xfrm xmlns:a="http://schemas.openxmlformats.org/drawingml/2006/main">
+            <a:off x="1714500" y="3476625"/>
+            <a:ext cx="9334500" cy="9525"/>
+          </a:xfrm>
+          <a:prstGeom xmlns:a="http://schemas.openxmlformats.org/drawingml/2006/main" prst="rect">
             <a:avLst/>
           </a:prstGeom>
           <a:solidFill xmlns:a="http://schemas.openxmlformats.org/drawingml/2006/main">
-            <a:srgbClr val="2C6E73"/>
+            <a:srgbClr val="D9E0E6"/>
           </a:solidFill>
           <a:ln xmlns:a="http://schemas.openxmlformats.org/drawingml/2006/main" w="0">
-            <a:noFill/>
+            <a:solidFill>
+              <a:srgbClr val="D9E0E6"/>
+            </a:solidFill>
           </a:ln>
         </p:spPr>
       </p:sp>
@@ -8585,19 +8591,19 @@
           <p:cNvPr id="18" name="">
             <a:extLst xmlns:a="http://schemas.openxmlformats.org/drawingml/2006/main">
               <a:ext uri="{FF2B5EF4-FFF2-40B4-BE49-F238E27FC236}">
-                <a16:creationId xmlns:a16="http://schemas.microsoft.com/office/drawing/2014/main" id="{9A2D2C0A-9670-4BCE-A9C9-FDE6471EB847}"/>
-              </a:ext>
-            </a:extLst>
-          </p:cNvPr>
-          <p:cNvSpPr>
-            <a:spLocks xmlns:a="http://schemas.openxmlformats.org/drawingml/2006/main" noGrp="1"/>
-          </p:cNvSpPr>
-          <p:nvPr/>
-        </p:nvSpPr>
-        <p:spPr>
-          <a:xfrm xmlns:a="http://schemas.openxmlformats.org/drawingml/2006/main">
-            <a:off x="1000125" y="3762375"/>
-            <a:ext cx="476250" cy="419100"/>
+                <a16:creationId xmlns:a16="http://schemas.microsoft.com/office/drawing/2014/main" id="{EA6BCA81-BAFB-4BCA-80DC-C81023880641}"/>
+              </a:ext>
+            </a:extLst>
+          </p:cNvPr>
+          <p:cNvSpPr>
+            <a:spLocks xmlns:a="http://schemas.openxmlformats.org/drawingml/2006/main" noGrp="1"/>
+          </p:cNvSpPr>
+          <p:nvPr/>
+        </p:nvSpPr>
+        <p:spPr>
+          <a:xfrm xmlns:a="http://schemas.openxmlformats.org/drawingml/2006/main">
+            <a:off x="1162050" y="3609975"/>
+            <a:ext cx="400050" cy="400050"/>
           </a:xfrm>
           <a:prstGeom xmlns:a="http://schemas.openxmlformats.org/drawingml/2006/main" prst="rect">
             <a:avLst/>
@@ -8614,9 +8620,9 @@
           <a:lstStyle xmlns:a="http://schemas.openxmlformats.org/drawingml/2006/main"/>
           <a:p xmlns:a="http://schemas.openxmlformats.org/drawingml/2006/main">
             <a:pPr algn="ctr">
-              <a:defRPr sz="1350" b="1">
-                <a:solidFill>
-                  <a:srgbClr val="FFFFFF"/>
+              <a:defRPr sz="1125" b="1">
+                <a:solidFill>
+                  <a:srgbClr val="2C6E73"/>
                 </a:solidFill>
                 <a:latin typeface="Arial"/>
                 <a:ea typeface="Arial"/>
@@ -8624,9 +8630,9 @@
               </a:defRPr>
             </a:pPr>
             <a:r>
-              <a:rPr sz="1350" b="1">
-                <a:solidFill>
-                  <a:srgbClr val="FFFFFF"/>
+              <a:rPr sz="1125" b="1">
+                <a:solidFill>
+                  <a:srgbClr val="2C6E73"/>
                 </a:solidFill>
                 <a:latin typeface="Arial"/>
                 <a:ea typeface="Arial"/>
@@ -8642,19 +8648,19 @@
           <p:cNvPr id="19" name="">
             <a:extLst xmlns:a="http://schemas.openxmlformats.org/drawingml/2006/main">
               <a:ext uri="{FF2B5EF4-FFF2-40B4-BE49-F238E27FC236}">
-                <a16:creationId xmlns:a16="http://schemas.microsoft.com/office/drawing/2014/main" id="{C57EDA5E-2FC1-491B-A9F5-149E0D16C317}"/>
-              </a:ext>
-            </a:extLst>
-          </p:cNvPr>
-          <p:cNvSpPr>
-            <a:spLocks xmlns:a="http://schemas.openxmlformats.org/drawingml/2006/main" noGrp="1"/>
-          </p:cNvSpPr>
-          <p:nvPr/>
-        </p:nvSpPr>
-        <p:spPr>
-          <a:xfrm xmlns:a="http://schemas.openxmlformats.org/drawingml/2006/main">
-            <a:off x="1714500" y="3667125"/>
-            <a:ext cx="9429750" cy="609600"/>
+                <a16:creationId xmlns:a16="http://schemas.microsoft.com/office/drawing/2014/main" id="{6FE4644E-99E2-4064-AF51-10D51AC17FFD}"/>
+              </a:ext>
+            </a:extLst>
+          </p:cNvPr>
+          <p:cNvSpPr>
+            <a:spLocks xmlns:a="http://schemas.openxmlformats.org/drawingml/2006/main" noGrp="1"/>
+          </p:cNvSpPr>
+          <p:nvPr/>
+        </p:nvSpPr>
+        <p:spPr>
+          <a:xfrm xmlns:a="http://schemas.openxmlformats.org/drawingml/2006/main">
+            <a:off x="1714500" y="3524250"/>
+            <a:ext cx="9525000" cy="638175"/>
           </a:xfrm>
           <a:prstGeom xmlns:a="http://schemas.openxmlformats.org/drawingml/2006/main" prst="rect">
             <a:avLst/>
@@ -8671,7 +8677,7 @@
           <a:lstStyle xmlns:a="http://schemas.openxmlformats.org/drawingml/2006/main"/>
           <a:p xmlns:a="http://schemas.openxmlformats.org/drawingml/2006/main">
             <a:pPr algn="l">
-              <a:defRPr sz="1500" b="0">
+              <a:defRPr sz="1575" b="0">
                 <a:solidFill>
                   <a:srgbClr val="17253A"/>
                 </a:solidFill>
@@ -8681,7 +8687,7 @@
               </a:defRPr>
             </a:pPr>
             <a:r>
-              <a:rPr sz="1500" b="0">
+              <a:rPr sz="1575" b="0">
                 <a:solidFill>
                   <a:srgbClr val="17253A"/>
                 </a:solidFill>
@@ -8689,7 +8695,7 @@
                 <a:ea typeface="Arial"/>
                 <a:cs typeface="Arial"/>
               </a:rPr>
-              <a:t>Complete the calculation: 16.</a:t>
+              <a:t>Scale the second part by the same 4</a:t>
             </a:r>
           </a:p>
         </p:txBody>
@@ -8699,28 +8705,30 @@
           <p:cNvPr id="20" name="">
             <a:extLst xmlns:a="http://schemas.openxmlformats.org/drawingml/2006/main">
               <a:ext uri="{FF2B5EF4-FFF2-40B4-BE49-F238E27FC236}">
-                <a16:creationId xmlns:a16="http://schemas.microsoft.com/office/drawing/2014/main" id="{D25475F9-C363-443E-BD5A-4A1E2B0D1D9C}"/>
-              </a:ext>
-            </a:extLst>
-          </p:cNvPr>
-          <p:cNvSpPr>
-            <a:spLocks xmlns:a="http://schemas.openxmlformats.org/drawingml/2006/main" noGrp="1"/>
-          </p:cNvSpPr>
-          <p:nvPr/>
-        </p:nvSpPr>
-        <p:spPr>
-          <a:xfrm xmlns:a="http://schemas.openxmlformats.org/drawingml/2006/main">
-            <a:off x="1000125" y="4476750"/>
-            <a:ext cx="476250" cy="476250"/>
-          </a:xfrm>
-          <a:prstGeom xmlns:a="http://schemas.openxmlformats.org/drawingml/2006/main" prst="ellipse">
+                <a16:creationId xmlns:a16="http://schemas.microsoft.com/office/drawing/2014/main" id="{27CFA21B-6875-43E3-986C-848A32CF561C}"/>
+              </a:ext>
+            </a:extLst>
+          </p:cNvPr>
+          <p:cNvSpPr>
+            <a:spLocks xmlns:a="http://schemas.openxmlformats.org/drawingml/2006/main" noGrp="1"/>
+          </p:cNvSpPr>
+          <p:nvPr/>
+        </p:nvSpPr>
+        <p:spPr>
+          <a:xfrm xmlns:a="http://schemas.openxmlformats.org/drawingml/2006/main">
+            <a:off x="1714500" y="4181475"/>
+            <a:ext cx="9334500" cy="9525"/>
+          </a:xfrm>
+          <a:prstGeom xmlns:a="http://schemas.openxmlformats.org/drawingml/2006/main" prst="rect">
             <a:avLst/>
           </a:prstGeom>
           <a:solidFill xmlns:a="http://schemas.openxmlformats.org/drawingml/2006/main">
-            <a:srgbClr val="2C6E73"/>
+            <a:srgbClr val="D9E0E6"/>
           </a:solidFill>
           <a:ln xmlns:a="http://schemas.openxmlformats.org/drawingml/2006/main" w="0">
-            <a:noFill/>
+            <a:solidFill>
+              <a:srgbClr val="D9E0E6"/>
+            </a:solidFill>
           </a:ln>
         </p:spPr>
       </p:sp>
@@ -8729,19 +8737,19 @@
           <p:cNvPr id="21" name="">
             <a:extLst xmlns:a="http://schemas.openxmlformats.org/drawingml/2006/main">
               <a:ext uri="{FF2B5EF4-FFF2-40B4-BE49-F238E27FC236}">
-                <a16:creationId xmlns:a16="http://schemas.microsoft.com/office/drawing/2014/main" id="{596BFDF5-3AA4-404E-80FF-24BCBFDCE1C8}"/>
-              </a:ext>
-            </a:extLst>
-          </p:cNvPr>
-          <p:cNvSpPr>
-            <a:spLocks xmlns:a="http://schemas.openxmlformats.org/drawingml/2006/main" noGrp="1"/>
-          </p:cNvSpPr>
-          <p:nvPr/>
-        </p:nvSpPr>
-        <p:spPr>
-          <a:xfrm xmlns:a="http://schemas.openxmlformats.org/drawingml/2006/main">
-            <a:off x="1000125" y="4505325"/>
-            <a:ext cx="476250" cy="419100"/>
+                <a16:creationId xmlns:a16="http://schemas.microsoft.com/office/drawing/2014/main" id="{CD77CC5F-9ADB-4D62-A95F-3EE1356AFE88}"/>
+              </a:ext>
+            </a:extLst>
+          </p:cNvPr>
+          <p:cNvSpPr>
+            <a:spLocks xmlns:a="http://schemas.openxmlformats.org/drawingml/2006/main" noGrp="1"/>
+          </p:cNvSpPr>
+          <p:nvPr/>
+        </p:nvSpPr>
+        <p:spPr>
+          <a:xfrm xmlns:a="http://schemas.openxmlformats.org/drawingml/2006/main">
+            <a:off x="1162050" y="4314825"/>
+            <a:ext cx="400050" cy="400050"/>
           </a:xfrm>
           <a:prstGeom xmlns:a="http://schemas.openxmlformats.org/drawingml/2006/main" prst="rect">
             <a:avLst/>
@@ -8758,9 +8766,9 @@
           <a:lstStyle xmlns:a="http://schemas.openxmlformats.org/drawingml/2006/main"/>
           <a:p xmlns:a="http://schemas.openxmlformats.org/drawingml/2006/main">
             <a:pPr algn="ctr">
-              <a:defRPr sz="1350" b="1">
-                <a:solidFill>
-                  <a:srgbClr val="FFFFFF"/>
+              <a:defRPr sz="1125" b="1">
+                <a:solidFill>
+                  <a:srgbClr val="2C6E73"/>
                 </a:solidFill>
                 <a:latin typeface="Arial"/>
                 <a:ea typeface="Arial"/>
@@ -8768,9 +8776,9 @@
               </a:defRPr>
             </a:pPr>
             <a:r>
-              <a:rPr sz="1350" b="1">
-                <a:solidFill>
-                  <a:srgbClr val="FFFFFF"/>
+              <a:rPr sz="1125" b="1">
+                <a:solidFill>
+                  <a:srgbClr val="2C6E73"/>
                 </a:solidFill>
                 <a:latin typeface="Arial"/>
                 <a:ea typeface="Arial"/>
@@ -8786,19 +8794,19 @@
           <p:cNvPr id="22" name="">
             <a:extLst xmlns:a="http://schemas.openxmlformats.org/drawingml/2006/main">
               <a:ext uri="{FF2B5EF4-FFF2-40B4-BE49-F238E27FC236}">
-                <a16:creationId xmlns:a16="http://schemas.microsoft.com/office/drawing/2014/main" id="{59A03CB9-A137-40B1-B972-03361F7EEBB4}"/>
-              </a:ext>
-            </a:extLst>
-          </p:cNvPr>
-          <p:cNvSpPr>
-            <a:spLocks xmlns:a="http://schemas.openxmlformats.org/drawingml/2006/main" noGrp="1"/>
-          </p:cNvSpPr>
-          <p:nvPr/>
-        </p:nvSpPr>
-        <p:spPr>
-          <a:xfrm xmlns:a="http://schemas.openxmlformats.org/drawingml/2006/main">
-            <a:off x="1714500" y="4410075"/>
-            <a:ext cx="9429750" cy="609600"/>
+                <a16:creationId xmlns:a16="http://schemas.microsoft.com/office/drawing/2014/main" id="{0619B7CE-04E3-4A3E-9021-3550E5C55062}"/>
+              </a:ext>
+            </a:extLst>
+          </p:cNvPr>
+          <p:cNvSpPr>
+            <a:spLocks xmlns:a="http://schemas.openxmlformats.org/drawingml/2006/main" noGrp="1"/>
+          </p:cNvSpPr>
+          <p:nvPr/>
+        </p:nvSpPr>
+        <p:spPr>
+          <a:xfrm xmlns:a="http://schemas.openxmlformats.org/drawingml/2006/main">
+            <a:off x="1714500" y="4229100"/>
+            <a:ext cx="9525000" cy="638175"/>
           </a:xfrm>
           <a:prstGeom xmlns:a="http://schemas.openxmlformats.org/drawingml/2006/main" prst="rect">
             <a:avLst/>
@@ -8815,9 +8823,9 @@
           <a:lstStyle xmlns:a="http://schemas.openxmlformats.org/drawingml/2006/main"/>
           <a:p xmlns:a="http://schemas.openxmlformats.org/drawingml/2006/main">
             <a:pPr algn="l">
-              <a:defRPr sz="1500" b="1">
-                <a:solidFill>
-                  <a:srgbClr val="2F785D"/>
+              <a:defRPr sz="1575" b="0">
+                <a:solidFill>
+                  <a:srgbClr val="17253A"/>
                 </a:solidFill>
                 <a:latin typeface="Arial"/>
                 <a:ea typeface="Arial"/>
@@ -8825,15 +8833,161 @@
               </a:defRPr>
             </a:pPr>
             <a:r>
-              <a:rPr sz="1500" b="1">
+              <a:rPr sz="1575" b="0">
+                <a:solidFill>
+                  <a:srgbClr val="17253A"/>
+                </a:solidFill>
+                <a:latin typeface="Arial"/>
+                <a:ea typeface="Arial"/>
+                <a:cs typeface="Arial"/>
+              </a:rPr>
+              <a:t>4 × 4 = 16</a:t>
+            </a:r>
+          </a:p>
+        </p:txBody>
+      </p:sp>
+      <p:sp>
+        <p:nvSpPr>
+          <p:cNvPr id="23" name="">
+            <a:extLst xmlns:a="http://schemas.openxmlformats.org/drawingml/2006/main">
+              <a:ext uri="{FF2B5EF4-FFF2-40B4-BE49-F238E27FC236}">
+                <a16:creationId xmlns:a16="http://schemas.microsoft.com/office/drawing/2014/main" id="{61BE3B2D-F0DE-4717-9AB0-388E4AB27824}"/>
+              </a:ext>
+            </a:extLst>
+          </p:cNvPr>
+          <p:cNvSpPr>
+            <a:spLocks xmlns:a="http://schemas.openxmlformats.org/drawingml/2006/main" noGrp="1"/>
+          </p:cNvSpPr>
+          <p:nvPr/>
+        </p:nvSpPr>
+        <p:spPr>
+          <a:xfrm xmlns:a="http://schemas.openxmlformats.org/drawingml/2006/main">
+            <a:off x="1714500" y="4886325"/>
+            <a:ext cx="9334500" cy="9525"/>
+          </a:xfrm>
+          <a:prstGeom xmlns:a="http://schemas.openxmlformats.org/drawingml/2006/main" prst="rect">
+            <a:avLst/>
+          </a:prstGeom>
+          <a:solidFill xmlns:a="http://schemas.openxmlformats.org/drawingml/2006/main">
+            <a:srgbClr val="D9E0E6"/>
+          </a:solidFill>
+          <a:ln xmlns:a="http://schemas.openxmlformats.org/drawingml/2006/main" w="0">
+            <a:solidFill>
+              <a:srgbClr val="D9E0E6"/>
+            </a:solidFill>
+          </a:ln>
+        </p:spPr>
+      </p:sp>
+      <p:sp>
+        <p:nvSpPr>
+          <p:cNvPr id="24" name="">
+            <a:extLst xmlns:a="http://schemas.openxmlformats.org/drawingml/2006/main">
+              <a:ext uri="{FF2B5EF4-FFF2-40B4-BE49-F238E27FC236}">
+                <a16:creationId xmlns:a16="http://schemas.microsoft.com/office/drawing/2014/main" id="{390F63D3-3019-4E56-B27F-62AF9268075D}"/>
+              </a:ext>
+            </a:extLst>
+          </p:cNvPr>
+          <p:cNvSpPr>
+            <a:spLocks xmlns:a="http://schemas.openxmlformats.org/drawingml/2006/main" noGrp="1"/>
+          </p:cNvSpPr>
+          <p:nvPr/>
+        </p:nvSpPr>
+        <p:spPr>
+          <a:xfrm xmlns:a="http://schemas.openxmlformats.org/drawingml/2006/main">
+            <a:off x="1162050" y="5019675"/>
+            <a:ext cx="400050" cy="400050"/>
+          </a:xfrm>
+          <a:prstGeom xmlns:a="http://schemas.openxmlformats.org/drawingml/2006/main" prst="rect">
+            <a:avLst/>
+          </a:prstGeom>
+          <a:noFill xmlns:a="http://schemas.openxmlformats.org/drawingml/2006/main"/>
+          <a:ln xmlns:a="http://schemas.openxmlformats.org/drawingml/2006/main" w="0">
+            <a:noFill/>
+          </a:ln>
+        </p:spPr>
+        <p:txBody>
+          <a:bodyPr xmlns:a="http://schemas.openxmlformats.org/drawingml/2006/main" anchor="ctr">
+            <a:normAutofit fontScale="100000"/>
+          </a:bodyPr>
+          <a:lstStyle xmlns:a="http://schemas.openxmlformats.org/drawingml/2006/main"/>
+          <a:p xmlns:a="http://schemas.openxmlformats.org/drawingml/2006/main">
+            <a:pPr algn="ctr">
+              <a:defRPr sz="1125" b="1">
                 <a:solidFill>
                   <a:srgbClr val="2F785D"/>
                 </a:solidFill>
                 <a:latin typeface="Arial"/>
                 <a:ea typeface="Arial"/>
                 <a:cs typeface="Arial"/>
+              </a:defRPr>
+            </a:pPr>
+            <a:r>
+              <a:rPr sz="1125" b="1">
+                <a:solidFill>
+                  <a:srgbClr val="2F785D"/>
+                </a:solidFill>
+                <a:latin typeface="Arial"/>
+                <a:ea typeface="Arial"/>
+                <a:cs typeface="Arial"/>
               </a:rPr>
-              <a:t>Check the result: Check the relationship using a table, bar or sentence.</a:t>
+              <a:t>5</a:t>
+            </a:r>
+          </a:p>
+        </p:txBody>
+      </p:sp>
+      <p:sp>
+        <p:nvSpPr>
+          <p:cNvPr id="25" name="">
+            <a:extLst xmlns:a="http://schemas.openxmlformats.org/drawingml/2006/main">
+              <a:ext uri="{FF2B5EF4-FFF2-40B4-BE49-F238E27FC236}">
+                <a16:creationId xmlns:a16="http://schemas.microsoft.com/office/drawing/2014/main" id="{F35EF7D3-E5A7-4A0B-B188-A5B14B57F4CA}"/>
+              </a:ext>
+            </a:extLst>
+          </p:cNvPr>
+          <p:cNvSpPr>
+            <a:spLocks xmlns:a="http://schemas.openxmlformats.org/drawingml/2006/main" noGrp="1"/>
+          </p:cNvSpPr>
+          <p:nvPr/>
+        </p:nvSpPr>
+        <p:spPr>
+          <a:xfrm xmlns:a="http://schemas.openxmlformats.org/drawingml/2006/main">
+            <a:off x="1714500" y="4933950"/>
+            <a:ext cx="9525000" cy="638175"/>
+          </a:xfrm>
+          <a:prstGeom xmlns:a="http://schemas.openxmlformats.org/drawingml/2006/main" prst="rect">
+            <a:avLst/>
+          </a:prstGeom>
+          <a:noFill xmlns:a="http://schemas.openxmlformats.org/drawingml/2006/main"/>
+          <a:ln xmlns:a="http://schemas.openxmlformats.org/drawingml/2006/main" w="0">
+            <a:noFill/>
+          </a:ln>
+        </p:spPr>
+        <p:txBody>
+          <a:bodyPr xmlns:a="http://schemas.openxmlformats.org/drawingml/2006/main" anchor="ctr">
+            <a:normAutofit fontScale="100000"/>
+          </a:bodyPr>
+          <a:lstStyle xmlns:a="http://schemas.openxmlformats.org/drawingml/2006/main"/>
+          <a:p xmlns:a="http://schemas.openxmlformats.org/drawingml/2006/main">
+            <a:pPr algn="l">
+              <a:defRPr sz="1575" b="1">
+                <a:solidFill>
+                  <a:srgbClr val="2F785D"/>
+                </a:solidFill>
+                <a:latin typeface="Arial"/>
+                <a:ea typeface="Arial"/>
+                <a:cs typeface="Arial"/>
+              </a:defRPr>
+            </a:pPr>
+            <a:r>
+              <a:rPr sz="1575" b="1">
+                <a:solidFill>
+                  <a:srgbClr val="2F785D"/>
+                </a:solidFill>
+                <a:latin typeface="Arial"/>
+                <a:ea typeface="Arial"/>
+                <a:cs typeface="Arial"/>
+              </a:rPr>
+              <a:t>7 : 4 = 28 : 16</a:t>
             </a:r>
           </a:p>
         </p:txBody>
@@ -8841,7 +8995,7 @@
     </p:spTree>
     <p:extLst>
       <p:ext uri="{BB962C8B-B14F-4D97-AF65-F5344CB8AC3E}">
-        <p14:creationId xmlns:p14="http://schemas.microsoft.com/office/powerpoint/2010/main" val="1920895021"/>
+        <p14:creationId xmlns:p14="http://schemas.microsoft.com/office/powerpoint/2010/main" val="388160015"/>
       </p:ext>
     </p:extLst>
   </p:cSld>
@@ -9078,6 +9232,51 @@
                       </p:childTnLst>
                     </p:cTn>
                   </p:par>
+                  <p:par>
+                    <p:cTn id="23" fill="hold">
+                      <p:stCondLst>
+                        <p:cond delay="indefinite"/>
+                      </p:stCondLst>
+                      <p:childTnLst>
+                        <p:par>
+                          <p:cTn id="24" fill="hold">
+                            <p:stCondLst>
+                              <p:cond delay="0"/>
+                            </p:stCondLst>
+                            <p:childTnLst>
+                              <p:par>
+                                <p:cTn id="25" presetID="1" presetClass="entr" presetSubtype="0" fill="hold" grpId="0" nodeType="clickEffect">
+                                  <p:stCondLst>
+                                    <p:cond delay="0"/>
+                                  </p:stCondLst>
+                                  <p:childTnLst>
+                                    <p:set>
+                                      <p:cBhvr>
+                                        <p:cTn id="26" dur="1" fill="hold">
+                                          <p:stCondLst>
+                                            <p:cond delay="0"/>
+                                          </p:stCondLst>
+                                        </p:cTn>
+                                        <p:tgtEl>
+                                          <p:spTgt spid="25"/>
+                                        </p:tgtEl>
+                                        <p:attrNameLst>
+                                          <p:attrName>style.visibility</p:attrName>
+                                        </p:attrNameLst>
+                                      </p:cBhvr>
+                                      <p:to>
+                                        <p:strVal val="visible"/>
+                                      </p:to>
+                                    </p:set>
+                                  </p:childTnLst>
+                                </p:cTn>
+                              </p:par>
+                            </p:childTnLst>
+                          </p:cTn>
+                        </p:par>
+                      </p:childTnLst>
+                    </p:cTn>
+                  </p:par>
                 </p:childTnLst>
               </p:cTn>
               <p:prevCondLst>
@@ -9105,6 +9304,7 @@
       <p:bldP spid="16" grpId="0"/>
       <p:bldP spid="19" grpId="0"/>
       <p:bldP spid="22" grpId="0"/>
+      <p:bldP spid="25" grpId="0"/>
     </p:bldLst>
   </p:timing>
 </p:sld>
@@ -9134,7 +9334,7 @@
           <p:cNvPr id="15" name="">
             <a:extLst xmlns:a="http://schemas.openxmlformats.org/drawingml/2006/main">
               <a:ext uri="{FF2B5EF4-FFF2-40B4-BE49-F238E27FC236}">
-                <a16:creationId xmlns:a16="http://schemas.microsoft.com/office/drawing/2014/main" id="{E7812775-B787-47E9-B9FF-B26B96D7CA6A}"/>
+                <a16:creationId xmlns:a16="http://schemas.microsoft.com/office/drawing/2014/main" id="{6836F602-498E-4819-B6F5-8EB29F74F79A}"/>
               </a:ext>
             </a:extLst>
           </p:cNvPr>
@@ -9166,7 +9366,7 @@
           <p:cNvPr id="2" name="">
             <a:extLst xmlns:a="http://schemas.openxmlformats.org/drawingml/2006/main">
               <a:ext uri="{FF2B5EF4-FFF2-40B4-BE49-F238E27FC236}">
-                <a16:creationId xmlns:a16="http://schemas.microsoft.com/office/drawing/2014/main" id="{3D135DF9-C368-49D3-A82B-657DC6EA5D7F}"/>
+                <a16:creationId xmlns:a16="http://schemas.microsoft.com/office/drawing/2014/main" id="{F03026DC-6DE4-4F88-94D2-E79AC24E284B}"/>
               </a:ext>
             </a:extLst>
           </p:cNvPr>
@@ -9223,7 +9423,7 @@
           <p:cNvPr id="3" name="">
             <a:extLst xmlns:a="http://schemas.openxmlformats.org/drawingml/2006/main">
               <a:ext uri="{FF2B5EF4-FFF2-40B4-BE49-F238E27FC236}">
-                <a16:creationId xmlns:a16="http://schemas.microsoft.com/office/drawing/2014/main" id="{8426F50E-B180-429F-9BE7-2686E9F96E5A}"/>
+                <a16:creationId xmlns:a16="http://schemas.microsoft.com/office/drawing/2014/main" id="{36948797-6071-4A2F-873E-0B36AFD3B7BA}"/>
               </a:ext>
             </a:extLst>
           </p:cNvPr>
@@ -9255,7 +9455,7 @@
           <p:cNvPr id="4" name="">
             <a:extLst xmlns:a="http://schemas.openxmlformats.org/drawingml/2006/main">
               <a:ext uri="{FF2B5EF4-FFF2-40B4-BE49-F238E27FC236}">
-                <a16:creationId xmlns:a16="http://schemas.microsoft.com/office/drawing/2014/main" id="{A704CC9E-7F55-406A-B22A-34980CBC7731}"/>
+                <a16:creationId xmlns:a16="http://schemas.microsoft.com/office/drawing/2014/main" id="{AA87264A-76A4-4668-B4B8-7D402CAF797A}"/>
               </a:ext>
             </a:extLst>
           </p:cNvPr>
@@ -9312,7 +9512,7 @@
           <p:cNvPr id="5" name="">
             <a:extLst xmlns:a="http://schemas.openxmlformats.org/drawingml/2006/main">
               <a:ext uri="{FF2B5EF4-FFF2-40B4-BE49-F238E27FC236}">
-                <a16:creationId xmlns:a16="http://schemas.microsoft.com/office/drawing/2014/main" id="{EFE222D8-AE20-4B57-B55F-031028147D37}"/>
+                <a16:creationId xmlns:a16="http://schemas.microsoft.com/office/drawing/2014/main" id="{8ABCCCEF-F0C3-4B05-878C-EB0AEA1C8F47}"/>
               </a:ext>
             </a:extLst>
           </p:cNvPr>
@@ -9369,7 +9569,7 @@
           <p:cNvPr id="6" name="">
             <a:extLst xmlns:a="http://schemas.openxmlformats.org/drawingml/2006/main">
               <a:ext uri="{FF2B5EF4-FFF2-40B4-BE49-F238E27FC236}">
-                <a16:creationId xmlns:a16="http://schemas.microsoft.com/office/drawing/2014/main" id="{452AF874-0521-4BA3-9B7F-D9F5BFC3817B}"/>
+                <a16:creationId xmlns:a16="http://schemas.microsoft.com/office/drawing/2014/main" id="{4A583045-81DD-4363-923F-485C76D6B7D3}"/>
               </a:ext>
             </a:extLst>
           </p:cNvPr>
@@ -9426,7 +9626,7 @@
           <p:cNvPr id="7" name="">
             <a:extLst xmlns:a="http://schemas.openxmlformats.org/drawingml/2006/main">
               <a:ext uri="{FF2B5EF4-FFF2-40B4-BE49-F238E27FC236}">
-                <a16:creationId xmlns:a16="http://schemas.microsoft.com/office/drawing/2014/main" id="{45F34E8E-C770-4D86-9710-0A13AD5D94B0}"/>
+                <a16:creationId xmlns:a16="http://schemas.microsoft.com/office/drawing/2014/main" id="{FB3B7162-5B8C-4CCA-9803-15DB02CB28CF}"/>
               </a:ext>
             </a:extLst>
           </p:cNvPr>
@@ -9458,7 +9658,7 @@
           <p:cNvPr id="8" name="">
             <a:extLst xmlns:a="http://schemas.openxmlformats.org/drawingml/2006/main">
               <a:ext uri="{FF2B5EF4-FFF2-40B4-BE49-F238E27FC236}">
-                <a16:creationId xmlns:a16="http://schemas.microsoft.com/office/drawing/2014/main" id="{2A798A28-8AFE-4684-980C-1B74F5012110}"/>
+                <a16:creationId xmlns:a16="http://schemas.microsoft.com/office/drawing/2014/main" id="{6C3773F1-D708-4CF0-ADA1-E603A41B9BB0}"/>
               </a:ext>
             </a:extLst>
           </p:cNvPr>
@@ -9515,7 +9715,7 @@
           <p:cNvPr id="9" name="">
             <a:extLst xmlns:a="http://schemas.openxmlformats.org/drawingml/2006/main">
               <a:ext uri="{FF2B5EF4-FFF2-40B4-BE49-F238E27FC236}">
-                <a16:creationId xmlns:a16="http://schemas.microsoft.com/office/drawing/2014/main" id="{1670A475-A192-4985-B633-5DE24563BC49}"/>
+                <a16:creationId xmlns:a16="http://schemas.microsoft.com/office/drawing/2014/main" id="{2B162316-86FF-42B6-BAB5-93A41F63AFF9}"/>
               </a:ext>
             </a:extLst>
           </p:cNvPr>
@@ -9572,7 +9772,7 @@
           <p:cNvPr id="10" name="">
             <a:extLst xmlns:a="http://schemas.openxmlformats.org/drawingml/2006/main">
               <a:ext uri="{FF2B5EF4-FFF2-40B4-BE49-F238E27FC236}">
-                <a16:creationId xmlns:a16="http://schemas.microsoft.com/office/drawing/2014/main" id="{D8BDBC21-199B-4343-8EED-20C180A6416F}"/>
+                <a16:creationId xmlns:a16="http://schemas.microsoft.com/office/drawing/2014/main" id="{EC8CEB5E-3D3E-476D-AC8B-E0678FC26F44}"/>
               </a:ext>
             </a:extLst>
           </p:cNvPr>
@@ -9629,7 +9829,7 @@
           <p:cNvPr id="11" name="">
             <a:extLst xmlns:a="http://schemas.openxmlformats.org/drawingml/2006/main">
               <a:ext uri="{FF2B5EF4-FFF2-40B4-BE49-F238E27FC236}">
-                <a16:creationId xmlns:a16="http://schemas.microsoft.com/office/drawing/2014/main" id="{65CA5B96-F96F-45B8-8A70-32FD94E8B018}"/>
+                <a16:creationId xmlns:a16="http://schemas.microsoft.com/office/drawing/2014/main" id="{EFCFC4EC-814C-4F20-BF4B-38B170A426F8}"/>
               </a:ext>
             </a:extLst>
           </p:cNvPr>
@@ -9686,7 +9886,7 @@
           <p:cNvPr id="12" name="">
             <a:extLst xmlns:a="http://schemas.openxmlformats.org/drawingml/2006/main">
               <a:ext uri="{FF2B5EF4-FFF2-40B4-BE49-F238E27FC236}">
-                <a16:creationId xmlns:a16="http://schemas.microsoft.com/office/drawing/2014/main" id="{6E01A786-69A6-4A7B-A972-D0A57541F55F}"/>
+                <a16:creationId xmlns:a16="http://schemas.microsoft.com/office/drawing/2014/main" id="{971A3464-278B-48FF-9DCA-073B5AFDEAD6}"/>
               </a:ext>
             </a:extLst>
           </p:cNvPr>
@@ -9718,7 +9918,7 @@
           <p:cNvPr id="13" name="">
             <a:extLst xmlns:a="http://schemas.openxmlformats.org/drawingml/2006/main">
               <a:ext uri="{FF2B5EF4-FFF2-40B4-BE49-F238E27FC236}">
-                <a16:creationId xmlns:a16="http://schemas.microsoft.com/office/drawing/2014/main" id="{98304700-7FEE-4F73-8770-00C25BC90843}"/>
+                <a16:creationId xmlns:a16="http://schemas.microsoft.com/office/drawing/2014/main" id="{50951444-7108-466C-8BB1-52A582A51ABB}"/>
               </a:ext>
             </a:extLst>
           </p:cNvPr>
@@ -9775,7 +9975,7 @@
           <p:cNvPr id="14" name="">
             <a:extLst xmlns:a="http://schemas.openxmlformats.org/drawingml/2006/main">
               <a:ext uri="{FF2B5EF4-FFF2-40B4-BE49-F238E27FC236}">
-                <a16:creationId xmlns:a16="http://schemas.microsoft.com/office/drawing/2014/main" id="{55253D39-4E64-4985-B938-7964F81D14E9}"/>
+                <a16:creationId xmlns:a16="http://schemas.microsoft.com/office/drawing/2014/main" id="{35B20F68-94E8-411D-A7B0-639ED90649C2}"/>
               </a:ext>
             </a:extLst>
           </p:cNvPr>
@@ -9830,7 +10030,7 @@
     </p:spTree>
     <p:extLst>
       <p:ext uri="{BB962C8B-B14F-4D97-AF65-F5344CB8AC3E}">
-        <p14:creationId xmlns:p14="http://schemas.microsoft.com/office/powerpoint/2010/main" val="1936962999"/>
+        <p14:creationId xmlns:p14="http://schemas.microsoft.com/office/powerpoint/2010/main" val="979699814"/>
       </p:ext>
     </p:extLst>
   </p:cSld>
@@ -10031,7 +10231,7 @@
           <p:cNvPr id="16" name="">
             <a:extLst xmlns:a="http://schemas.openxmlformats.org/drawingml/2006/main">
               <a:ext uri="{FF2B5EF4-FFF2-40B4-BE49-F238E27FC236}">
-                <a16:creationId xmlns:a16="http://schemas.microsoft.com/office/drawing/2014/main" id="{C6D652AA-C12D-4963-86AC-6F7FEB2C95AE}"/>
+                <a16:creationId xmlns:a16="http://schemas.microsoft.com/office/drawing/2014/main" id="{6D04BAA8-9543-47CE-A2C1-D2255A1BF2CF}"/>
               </a:ext>
             </a:extLst>
           </p:cNvPr>
@@ -10063,7 +10263,7 @@
           <p:cNvPr id="2" name="">
             <a:extLst xmlns:a="http://schemas.openxmlformats.org/drawingml/2006/main">
               <a:ext uri="{FF2B5EF4-FFF2-40B4-BE49-F238E27FC236}">
-                <a16:creationId xmlns:a16="http://schemas.microsoft.com/office/drawing/2014/main" id="{1960D086-2827-4FCE-B1AF-A0C2919DC44C}"/>
+                <a16:creationId xmlns:a16="http://schemas.microsoft.com/office/drawing/2014/main" id="{D0BADEC4-FE9E-4319-BF2B-E2C65E3E689D}"/>
               </a:ext>
             </a:extLst>
           </p:cNvPr>
@@ -10120,7 +10320,7 @@
           <p:cNvPr id="3" name="">
             <a:extLst xmlns:a="http://schemas.openxmlformats.org/drawingml/2006/main">
               <a:ext uri="{FF2B5EF4-FFF2-40B4-BE49-F238E27FC236}">
-                <a16:creationId xmlns:a16="http://schemas.microsoft.com/office/drawing/2014/main" id="{A251A786-86FA-40CA-A215-4B124D6169D2}"/>
+                <a16:creationId xmlns:a16="http://schemas.microsoft.com/office/drawing/2014/main" id="{3AA7FFD8-FEF9-4FDD-BD5E-B957DB11FF7A}"/>
               </a:ext>
             </a:extLst>
           </p:cNvPr>
@@ -10152,7 +10352,7 @@
           <p:cNvPr id="4" name="">
             <a:extLst xmlns:a="http://schemas.openxmlformats.org/drawingml/2006/main">
               <a:ext uri="{FF2B5EF4-FFF2-40B4-BE49-F238E27FC236}">
-                <a16:creationId xmlns:a16="http://schemas.microsoft.com/office/drawing/2014/main" id="{F44E5E14-7F3A-4A81-A162-06DD1B854EC1}"/>
+                <a16:creationId xmlns:a16="http://schemas.microsoft.com/office/drawing/2014/main" id="{B1CF8DAD-67FC-4A17-8ADE-AFFEE3011A6A}"/>
               </a:ext>
             </a:extLst>
           </p:cNvPr>
@@ -10209,7 +10409,7 @@
           <p:cNvPr id="5" name="">
             <a:extLst xmlns:a="http://schemas.openxmlformats.org/drawingml/2006/main">
               <a:ext uri="{FF2B5EF4-FFF2-40B4-BE49-F238E27FC236}">
-                <a16:creationId xmlns:a16="http://schemas.microsoft.com/office/drawing/2014/main" id="{1E0EFB10-5AAC-43D5-98CD-2A5D3839EEC5}"/>
+                <a16:creationId xmlns:a16="http://schemas.microsoft.com/office/drawing/2014/main" id="{4A4D713F-4844-43ED-B7D2-D050E53D3F75}"/>
               </a:ext>
             </a:extLst>
           </p:cNvPr>
@@ -10266,7 +10466,7 @@
           <p:cNvPr id="6" name="">
             <a:extLst xmlns:a="http://schemas.openxmlformats.org/drawingml/2006/main">
               <a:ext uri="{FF2B5EF4-FFF2-40B4-BE49-F238E27FC236}">
-                <a16:creationId xmlns:a16="http://schemas.microsoft.com/office/drawing/2014/main" id="{99CA1ECD-3ED8-4C60-861B-94213B8F5ED6}"/>
+                <a16:creationId xmlns:a16="http://schemas.microsoft.com/office/drawing/2014/main" id="{92EC040F-86CA-450C-AAE6-92C725EE09ED}"/>
               </a:ext>
             </a:extLst>
           </p:cNvPr>
@@ -10323,7 +10523,7 @@
           <p:cNvPr id="7" name="">
             <a:extLst xmlns:a="http://schemas.openxmlformats.org/drawingml/2006/main">
               <a:ext uri="{FF2B5EF4-FFF2-40B4-BE49-F238E27FC236}">
-                <a16:creationId xmlns:a16="http://schemas.microsoft.com/office/drawing/2014/main" id="{C1DBCF6E-1FA9-42B9-96AF-FC013130001B}"/>
+                <a16:creationId xmlns:a16="http://schemas.microsoft.com/office/drawing/2014/main" id="{5B87E9FF-40B6-4BDA-95CA-7B86394F48AB}"/>
               </a:ext>
             </a:extLst>
           </p:cNvPr>
@@ -10355,7 +10555,7 @@
           <p:cNvPr id="8" name="">
             <a:extLst xmlns:a="http://schemas.openxmlformats.org/drawingml/2006/main">
               <a:ext uri="{FF2B5EF4-FFF2-40B4-BE49-F238E27FC236}">
-                <a16:creationId xmlns:a16="http://schemas.microsoft.com/office/drawing/2014/main" id="{87EC73BD-509D-4B20-8D52-F1878D202CEA}"/>
+                <a16:creationId xmlns:a16="http://schemas.microsoft.com/office/drawing/2014/main" id="{FEC21405-59AB-42FD-AECE-290F2BB5DB3B}"/>
               </a:ext>
             </a:extLst>
           </p:cNvPr>
@@ -10412,7 +10612,7 @@
           <p:cNvPr id="9" name="">
             <a:extLst xmlns:a="http://schemas.openxmlformats.org/drawingml/2006/main">
               <a:ext uri="{FF2B5EF4-FFF2-40B4-BE49-F238E27FC236}">
-                <a16:creationId xmlns:a16="http://schemas.microsoft.com/office/drawing/2014/main" id="{280733E6-0FD4-450E-837C-14208EC81138}"/>
+                <a16:creationId xmlns:a16="http://schemas.microsoft.com/office/drawing/2014/main" id="{0ADC238C-3AC9-4EA7-9B71-98DA5414E5DA}"/>
               </a:ext>
             </a:extLst>
           </p:cNvPr>
@@ -10469,7 +10669,7 @@
           <p:cNvPr id="10" name="">
             <a:extLst xmlns:a="http://schemas.openxmlformats.org/drawingml/2006/main">
               <a:ext uri="{FF2B5EF4-FFF2-40B4-BE49-F238E27FC236}">
-                <a16:creationId xmlns:a16="http://schemas.microsoft.com/office/drawing/2014/main" id="{D704AA89-01CD-4073-9A30-EEAA814E9C11}"/>
+                <a16:creationId xmlns:a16="http://schemas.microsoft.com/office/drawing/2014/main" id="{34F91F24-E0FB-4958-87BF-DABD8585E055}"/>
               </a:ext>
             </a:extLst>
           </p:cNvPr>
@@ -10526,7 +10726,7 @@
           <p:cNvPr id="11" name="">
             <a:extLst xmlns:a="http://schemas.openxmlformats.org/drawingml/2006/main">
               <a:ext uri="{FF2B5EF4-FFF2-40B4-BE49-F238E27FC236}">
-                <a16:creationId xmlns:a16="http://schemas.microsoft.com/office/drawing/2014/main" id="{07FBB2B4-ECE5-4F7A-BE2E-EBADCCA60D25}"/>
+                <a16:creationId xmlns:a16="http://schemas.microsoft.com/office/drawing/2014/main" id="{C7D3CB75-1F45-4865-8429-1AA8472B4B6E}"/>
               </a:ext>
             </a:extLst>
           </p:cNvPr>
@@ -10583,7 +10783,7 @@
           <p:cNvPr id="12" name="">
             <a:extLst xmlns:a="http://schemas.openxmlformats.org/drawingml/2006/main">
               <a:ext uri="{FF2B5EF4-FFF2-40B4-BE49-F238E27FC236}">
-                <a16:creationId xmlns:a16="http://schemas.microsoft.com/office/drawing/2014/main" id="{66129562-CD96-49A9-A4BF-C575734C37CF}"/>
+                <a16:creationId xmlns:a16="http://schemas.microsoft.com/office/drawing/2014/main" id="{86E39476-D39A-46B7-94EA-D74F318113D8}"/>
               </a:ext>
             </a:extLst>
           </p:cNvPr>
@@ -10640,7 +10840,7 @@
           <p:cNvPr id="13" name="">
             <a:extLst xmlns:a="http://schemas.openxmlformats.org/drawingml/2006/main">
               <a:ext uri="{FF2B5EF4-FFF2-40B4-BE49-F238E27FC236}">
-                <a16:creationId xmlns:a16="http://schemas.microsoft.com/office/drawing/2014/main" id="{EFF5E711-55B7-4B0E-AC68-40A822510658}"/>
+                <a16:creationId xmlns:a16="http://schemas.microsoft.com/office/drawing/2014/main" id="{EF103159-D945-4CB8-A1E6-F0D77C45AFBA}"/>
               </a:ext>
             </a:extLst>
           </p:cNvPr>
@@ -10697,7 +10897,7 @@
           <p:cNvPr id="14" name="">
             <a:extLst xmlns:a="http://schemas.openxmlformats.org/drawingml/2006/main">
               <a:ext uri="{FF2B5EF4-FFF2-40B4-BE49-F238E27FC236}">
-                <a16:creationId xmlns:a16="http://schemas.microsoft.com/office/drawing/2014/main" id="{4390C83D-05C4-4CCC-AFF4-29771B8AC850}"/>
+                <a16:creationId xmlns:a16="http://schemas.microsoft.com/office/drawing/2014/main" id="{A34949ED-892C-45AA-8B81-9AE26CFBC8A8}"/>
               </a:ext>
             </a:extLst>
           </p:cNvPr>
@@ -10754,7 +10954,7 @@
           <p:cNvPr id="15" name="">
             <a:extLst xmlns:a="http://schemas.openxmlformats.org/drawingml/2006/main">
               <a:ext uri="{FF2B5EF4-FFF2-40B4-BE49-F238E27FC236}">
-                <a16:creationId xmlns:a16="http://schemas.microsoft.com/office/drawing/2014/main" id="{8BE86A3B-8024-462C-97ED-3246249EEA37}"/>
+                <a16:creationId xmlns:a16="http://schemas.microsoft.com/office/drawing/2014/main" id="{C008E73E-DE14-46DE-B0B6-DCCE748E5972}"/>
               </a:ext>
             </a:extLst>
           </p:cNvPr>
@@ -10809,7 +11009,7 @@
     </p:spTree>
     <p:extLst>
       <p:ext uri="{BB962C8B-B14F-4D97-AF65-F5344CB8AC3E}">
-        <p14:creationId xmlns:p14="http://schemas.microsoft.com/office/powerpoint/2010/main" val="398707757"/>
+        <p14:creationId xmlns:p14="http://schemas.microsoft.com/office/powerpoint/2010/main" val="388044404"/>
       </p:ext>
     </p:extLst>
   </p:cSld>
@@ -10964,7 +11164,7 @@
           <p:cNvPr id="16" name="">
             <a:extLst xmlns:a="http://schemas.openxmlformats.org/drawingml/2006/main">
               <a:ext uri="{FF2B5EF4-FFF2-40B4-BE49-F238E27FC236}">
-                <a16:creationId xmlns:a16="http://schemas.microsoft.com/office/drawing/2014/main" id="{12D9EFFF-C5E0-4FD4-B2B1-169408131076}"/>
+                <a16:creationId xmlns:a16="http://schemas.microsoft.com/office/drawing/2014/main" id="{0DD00627-A6A4-47B7-BCD3-D753ACAE7D72}"/>
               </a:ext>
             </a:extLst>
           </p:cNvPr>
@@ -10996,7 +11196,7 @@
           <p:cNvPr id="2" name="">
             <a:extLst xmlns:a="http://schemas.openxmlformats.org/drawingml/2006/main">
               <a:ext uri="{FF2B5EF4-FFF2-40B4-BE49-F238E27FC236}">
-                <a16:creationId xmlns:a16="http://schemas.microsoft.com/office/drawing/2014/main" id="{F210B228-8548-49EF-AB20-67FEF213BAAC}"/>
+                <a16:creationId xmlns:a16="http://schemas.microsoft.com/office/drawing/2014/main" id="{634E3F1B-0FD6-4653-BCD2-C42A93CE2463}"/>
               </a:ext>
             </a:extLst>
           </p:cNvPr>
@@ -11053,7 +11253,7 @@
           <p:cNvPr id="3" name="">
             <a:extLst xmlns:a="http://schemas.openxmlformats.org/drawingml/2006/main">
               <a:ext uri="{FF2B5EF4-FFF2-40B4-BE49-F238E27FC236}">
-                <a16:creationId xmlns:a16="http://schemas.microsoft.com/office/drawing/2014/main" id="{6E0DE824-270D-4B2B-9ADD-DB89F84EC78C}"/>
+                <a16:creationId xmlns:a16="http://schemas.microsoft.com/office/drawing/2014/main" id="{C924BA90-AC92-419B-9F94-8CA91C9A0292}"/>
               </a:ext>
             </a:extLst>
           </p:cNvPr>
@@ -11085,7 +11285,7 @@
           <p:cNvPr id="4" name="">
             <a:extLst xmlns:a="http://schemas.openxmlformats.org/drawingml/2006/main">
               <a:ext uri="{FF2B5EF4-FFF2-40B4-BE49-F238E27FC236}">
-                <a16:creationId xmlns:a16="http://schemas.microsoft.com/office/drawing/2014/main" id="{96E0FB01-31DC-4273-B80D-9808D8FC596D}"/>
+                <a16:creationId xmlns:a16="http://schemas.microsoft.com/office/drawing/2014/main" id="{B7E6CFAF-8A13-4B20-8F74-2F51CDEE570F}"/>
               </a:ext>
             </a:extLst>
           </p:cNvPr>
@@ -11142,7 +11342,7 @@
           <p:cNvPr id="5" name="">
             <a:extLst xmlns:a="http://schemas.openxmlformats.org/drawingml/2006/main">
               <a:ext uri="{FF2B5EF4-FFF2-40B4-BE49-F238E27FC236}">
-                <a16:creationId xmlns:a16="http://schemas.microsoft.com/office/drawing/2014/main" id="{AE29B20F-A688-4814-A111-1D2B3BD083DA}"/>
+                <a16:creationId xmlns:a16="http://schemas.microsoft.com/office/drawing/2014/main" id="{891EDC9E-C92D-4F5B-A1F1-50EF838BC79C}"/>
               </a:ext>
             </a:extLst>
           </p:cNvPr>
@@ -11199,7 +11399,7 @@
           <p:cNvPr id="6" name="">
             <a:extLst xmlns:a="http://schemas.openxmlformats.org/drawingml/2006/main">
               <a:ext uri="{FF2B5EF4-FFF2-40B4-BE49-F238E27FC236}">
-                <a16:creationId xmlns:a16="http://schemas.microsoft.com/office/drawing/2014/main" id="{72595955-8988-4FC8-BEFD-A5F491E3E560}"/>
+                <a16:creationId xmlns:a16="http://schemas.microsoft.com/office/drawing/2014/main" id="{96BF1C14-DD09-4D64-A068-0FA93D5DB406}"/>
               </a:ext>
             </a:extLst>
           </p:cNvPr>
@@ -11256,7 +11456,7 @@
           <p:cNvPr id="7" name="">
             <a:extLst xmlns:a="http://schemas.openxmlformats.org/drawingml/2006/main">
               <a:ext uri="{FF2B5EF4-FFF2-40B4-BE49-F238E27FC236}">
-                <a16:creationId xmlns:a16="http://schemas.microsoft.com/office/drawing/2014/main" id="{EB0790F5-75DA-46B9-9149-0D4FC54D9F48}"/>
+                <a16:creationId xmlns:a16="http://schemas.microsoft.com/office/drawing/2014/main" id="{8E310414-2C07-4943-BA23-61C8B0C38296}"/>
               </a:ext>
             </a:extLst>
           </p:cNvPr>
@@ -11288,7 +11488,7 @@
           <p:cNvPr id="8" name="">
             <a:extLst xmlns:a="http://schemas.openxmlformats.org/drawingml/2006/main">
               <a:ext uri="{FF2B5EF4-FFF2-40B4-BE49-F238E27FC236}">
-                <a16:creationId xmlns:a16="http://schemas.microsoft.com/office/drawing/2014/main" id="{C94766C6-5179-479A-8648-4BE007D785F1}"/>
+                <a16:creationId xmlns:a16="http://schemas.microsoft.com/office/drawing/2014/main" id="{926F710A-0364-41D8-8B96-95F787357AA4}"/>
               </a:ext>
             </a:extLst>
           </p:cNvPr>
@@ -11345,7 +11545,7 @@
           <p:cNvPr id="9" name="">
             <a:extLst xmlns:a="http://schemas.openxmlformats.org/drawingml/2006/main">
               <a:ext uri="{FF2B5EF4-FFF2-40B4-BE49-F238E27FC236}">
-                <a16:creationId xmlns:a16="http://schemas.microsoft.com/office/drawing/2014/main" id="{C42CDF9E-6377-4F15-9F4C-FB66423D4D79}"/>
+                <a16:creationId xmlns:a16="http://schemas.microsoft.com/office/drawing/2014/main" id="{01BF4490-4CD1-49BB-9DAC-2D103847506F}"/>
               </a:ext>
             </a:extLst>
           </p:cNvPr>
@@ -11406,7 +11606,7 @@
           <p:nvPr/>
         </p:nvPicPr>
         <p:blipFill>
-          <a:blip xmlns:r="http://schemas.openxmlformats.org/officeDocument/2006/relationships" xmlns:a="http://schemas.openxmlformats.org/drawingml/2006/main" r:embed="Rd73b86f3a982417f"/>
+          <a:blip xmlns:r="http://schemas.openxmlformats.org/officeDocument/2006/relationships" xmlns:a="http://schemas.openxmlformats.org/drawingml/2006/main" r:embed="R20e8a78706c045a3"/>
           <a:stretch xmlns:a="http://schemas.openxmlformats.org/drawingml/2006/main"/>
         </p:blipFill>
         <p:spPr>
@@ -11424,7 +11624,7 @@
           <p:cNvPr id="11" name="">
             <a:extLst xmlns:a="http://schemas.openxmlformats.org/drawingml/2006/main">
               <a:ext uri="{FF2B5EF4-FFF2-40B4-BE49-F238E27FC236}">
-                <a16:creationId xmlns:a16="http://schemas.microsoft.com/office/drawing/2014/main" id="{1912F4C1-D62C-44CB-9427-C25F6F49A1ED}"/>
+                <a16:creationId xmlns:a16="http://schemas.microsoft.com/office/drawing/2014/main" id="{EF2B9C7A-0183-4F2F-B775-EB68ED1834E4}"/>
               </a:ext>
             </a:extLst>
           </p:cNvPr>
@@ -11481,7 +11681,7 @@
           <p:cNvPr id="12" name="">
             <a:extLst xmlns:a="http://schemas.openxmlformats.org/drawingml/2006/main">
               <a:ext uri="{FF2B5EF4-FFF2-40B4-BE49-F238E27FC236}">
-                <a16:creationId xmlns:a16="http://schemas.microsoft.com/office/drawing/2014/main" id="{4EEB4389-912D-404B-8573-256D7210E580}"/>
+                <a16:creationId xmlns:a16="http://schemas.microsoft.com/office/drawing/2014/main" id="{417DB9ED-A100-47ED-9EDE-B31498E98DC7}"/>
               </a:ext>
             </a:extLst>
           </p:cNvPr>
@@ -11538,7 +11738,7 @@
           <p:cNvPr id="13" name="">
             <a:extLst xmlns:a="http://schemas.openxmlformats.org/drawingml/2006/main">
               <a:ext uri="{FF2B5EF4-FFF2-40B4-BE49-F238E27FC236}">
-                <a16:creationId xmlns:a16="http://schemas.microsoft.com/office/drawing/2014/main" id="{A7EB2F84-F8F6-4CB5-BC67-55E31A7A84CB}"/>
+                <a16:creationId xmlns:a16="http://schemas.microsoft.com/office/drawing/2014/main" id="{1738C61C-16D6-494E-8E6E-7E8E79918DF8}"/>
               </a:ext>
             </a:extLst>
           </p:cNvPr>
@@ -11570,7 +11770,7 @@
           <p:cNvPr id="14" name="">
             <a:extLst xmlns:a="http://schemas.openxmlformats.org/drawingml/2006/main">
               <a:ext uri="{FF2B5EF4-FFF2-40B4-BE49-F238E27FC236}">
-                <a16:creationId xmlns:a16="http://schemas.microsoft.com/office/drawing/2014/main" id="{2B1A6DA6-6049-462C-837D-5850A642E0E3}"/>
+                <a16:creationId xmlns:a16="http://schemas.microsoft.com/office/drawing/2014/main" id="{DE86B187-1C69-4F48-9C0C-9AEDA76A132F}"/>
               </a:ext>
             </a:extLst>
           </p:cNvPr>
@@ -11627,7 +11827,7 @@
           <p:cNvPr id="15" name="">
             <a:extLst xmlns:a="http://schemas.openxmlformats.org/drawingml/2006/main">
               <a:ext uri="{FF2B5EF4-FFF2-40B4-BE49-F238E27FC236}">
-                <a16:creationId xmlns:a16="http://schemas.microsoft.com/office/drawing/2014/main" id="{410F5BF8-7B5F-461F-AF71-013874ACA363}"/>
+                <a16:creationId xmlns:a16="http://schemas.microsoft.com/office/drawing/2014/main" id="{A0C12C54-F860-424F-B25F-6345FC382481}"/>
               </a:ext>
             </a:extLst>
           </p:cNvPr>
@@ -11682,7 +11882,7 @@
     </p:spTree>
     <p:extLst>
       <p:ext uri="{BB962C8B-B14F-4D97-AF65-F5344CB8AC3E}">
-        <p14:creationId xmlns:p14="http://schemas.microsoft.com/office/powerpoint/2010/main" val="1035906737"/>
+        <p14:creationId xmlns:p14="http://schemas.microsoft.com/office/powerpoint/2010/main" val="1103778776"/>
       </p:ext>
     </p:extLst>
   </p:cSld>
@@ -11837,7 +12037,7 @@
           <p:cNvPr id="23" name="">
             <a:extLst xmlns:a="http://schemas.openxmlformats.org/drawingml/2006/main">
               <a:ext uri="{FF2B5EF4-FFF2-40B4-BE49-F238E27FC236}">
-                <a16:creationId xmlns:a16="http://schemas.microsoft.com/office/drawing/2014/main" id="{9D60BA0E-3C78-425F-B459-7F831CD75CFA}"/>
+                <a16:creationId xmlns:a16="http://schemas.microsoft.com/office/drawing/2014/main" id="{DAF574B2-C6BA-417E-91A7-80B2F3121AF7}"/>
               </a:ext>
             </a:extLst>
           </p:cNvPr>
@@ -11869,7 +12069,7 @@
           <p:cNvPr id="2" name="">
             <a:extLst xmlns:a="http://schemas.openxmlformats.org/drawingml/2006/main">
               <a:ext uri="{FF2B5EF4-FFF2-40B4-BE49-F238E27FC236}">
-                <a16:creationId xmlns:a16="http://schemas.microsoft.com/office/drawing/2014/main" id="{3FDF4B5F-1924-487F-AE7D-BED0D5218483}"/>
+                <a16:creationId xmlns:a16="http://schemas.microsoft.com/office/drawing/2014/main" id="{BE80AA3D-80FA-42F4-8352-F24A12EBC614}"/>
               </a:ext>
             </a:extLst>
           </p:cNvPr>
@@ -11926,7 +12126,7 @@
           <p:cNvPr id="3" name="">
             <a:extLst xmlns:a="http://schemas.openxmlformats.org/drawingml/2006/main">
               <a:ext uri="{FF2B5EF4-FFF2-40B4-BE49-F238E27FC236}">
-                <a16:creationId xmlns:a16="http://schemas.microsoft.com/office/drawing/2014/main" id="{68F84C40-F7DD-4870-825C-3C301D79530F}"/>
+                <a16:creationId xmlns:a16="http://schemas.microsoft.com/office/drawing/2014/main" id="{5E19EA37-3B49-4CAB-BCBB-34057CFD22CD}"/>
               </a:ext>
             </a:extLst>
           </p:cNvPr>
@@ -11958,7 +12158,7 @@
           <p:cNvPr id="4" name="">
             <a:extLst xmlns:a="http://schemas.openxmlformats.org/drawingml/2006/main">
               <a:ext uri="{FF2B5EF4-FFF2-40B4-BE49-F238E27FC236}">
-                <a16:creationId xmlns:a16="http://schemas.microsoft.com/office/drawing/2014/main" id="{C8054FFF-774A-4136-AD20-B3A1EADCE522}"/>
+                <a16:creationId xmlns:a16="http://schemas.microsoft.com/office/drawing/2014/main" id="{BABEC636-4BA1-4FB3-8C11-3CF3910A2538}"/>
               </a:ext>
             </a:extLst>
           </p:cNvPr>
@@ -12015,7 +12215,7 @@
           <p:cNvPr id="5" name="">
             <a:extLst xmlns:a="http://schemas.openxmlformats.org/drawingml/2006/main">
               <a:ext uri="{FF2B5EF4-FFF2-40B4-BE49-F238E27FC236}">
-                <a16:creationId xmlns:a16="http://schemas.microsoft.com/office/drawing/2014/main" id="{13AC56C1-EB12-45EF-8A59-0BC5CEDCBE69}"/>
+                <a16:creationId xmlns:a16="http://schemas.microsoft.com/office/drawing/2014/main" id="{FCBB638E-D115-49AD-8F0C-8DA4271CCF3A}"/>
               </a:ext>
             </a:extLst>
           </p:cNvPr>
@@ -12072,7 +12272,7 @@
           <p:cNvPr id="6" name="">
             <a:extLst xmlns:a="http://schemas.openxmlformats.org/drawingml/2006/main">
               <a:ext uri="{FF2B5EF4-FFF2-40B4-BE49-F238E27FC236}">
-                <a16:creationId xmlns:a16="http://schemas.microsoft.com/office/drawing/2014/main" id="{F33E6AEC-C372-4490-83F1-E79ED2793483}"/>
+                <a16:creationId xmlns:a16="http://schemas.microsoft.com/office/drawing/2014/main" id="{DDB333D4-3AFF-40C1-9C37-1375F533B625}"/>
               </a:ext>
             </a:extLst>
           </p:cNvPr>
@@ -12129,7 +12329,7 @@
           <p:cNvPr id="7" name="">
             <a:extLst xmlns:a="http://schemas.openxmlformats.org/drawingml/2006/main">
               <a:ext uri="{FF2B5EF4-FFF2-40B4-BE49-F238E27FC236}">
-                <a16:creationId xmlns:a16="http://schemas.microsoft.com/office/drawing/2014/main" id="{568457B5-799B-46E4-8AEF-B1EE1061341C}"/>
+                <a16:creationId xmlns:a16="http://schemas.microsoft.com/office/drawing/2014/main" id="{95601C28-E205-4BC0-B32D-A0215D0D1529}"/>
               </a:ext>
             </a:extLst>
           </p:cNvPr>
@@ -12161,7 +12361,7 @@
           <p:cNvPr id="8" name="">
             <a:extLst xmlns:a="http://schemas.openxmlformats.org/drawingml/2006/main">
               <a:ext uri="{FF2B5EF4-FFF2-40B4-BE49-F238E27FC236}">
-                <a16:creationId xmlns:a16="http://schemas.microsoft.com/office/drawing/2014/main" id="{5072F71D-8443-4C68-AA91-3A52F0A0591B}"/>
+                <a16:creationId xmlns:a16="http://schemas.microsoft.com/office/drawing/2014/main" id="{77C54D16-332A-4D63-AE3A-8656A75BBC3C}"/>
               </a:ext>
             </a:extLst>
           </p:cNvPr>
@@ -12218,7 +12418,7 @@
           <p:cNvPr id="9" name="">
             <a:extLst xmlns:a="http://schemas.openxmlformats.org/drawingml/2006/main">
               <a:ext uri="{FF2B5EF4-FFF2-40B4-BE49-F238E27FC236}">
-                <a16:creationId xmlns:a16="http://schemas.microsoft.com/office/drawing/2014/main" id="{294299A0-D0B5-4F28-8F9A-3AC2D5B013F3}"/>
+                <a16:creationId xmlns:a16="http://schemas.microsoft.com/office/drawing/2014/main" id="{6545F942-EB21-4970-9FC9-D65FCC5A3F23}"/>
               </a:ext>
             </a:extLst>
           </p:cNvPr>
@@ -12275,7 +12475,7 @@
           <p:cNvPr id="10" name="">
             <a:extLst xmlns:a="http://schemas.openxmlformats.org/drawingml/2006/main">
               <a:ext uri="{FF2B5EF4-FFF2-40B4-BE49-F238E27FC236}">
-                <a16:creationId xmlns:a16="http://schemas.microsoft.com/office/drawing/2014/main" id="{17078C83-1237-4522-BE16-DE863BD5848E}"/>
+                <a16:creationId xmlns:a16="http://schemas.microsoft.com/office/drawing/2014/main" id="{847B5C56-1BF5-48F5-BBDE-3A8E27D72A0D}"/>
               </a:ext>
             </a:extLst>
           </p:cNvPr>
@@ -12309,7 +12509,7 @@
           <p:cNvPr id="11" name="">
             <a:extLst xmlns:a="http://schemas.openxmlformats.org/drawingml/2006/main">
               <a:ext uri="{FF2B5EF4-FFF2-40B4-BE49-F238E27FC236}">
-                <a16:creationId xmlns:a16="http://schemas.microsoft.com/office/drawing/2014/main" id="{294DD893-B3D2-4BA1-A02C-BE2F11AE902C}"/>
+                <a16:creationId xmlns:a16="http://schemas.microsoft.com/office/drawing/2014/main" id="{F7CF48F3-D5DF-4C2A-8F3A-A842BC88F547}"/>
               </a:ext>
             </a:extLst>
           </p:cNvPr>
@@ -12341,7 +12541,7 @@
           <p:cNvPr id="12" name="">
             <a:extLst xmlns:a="http://schemas.openxmlformats.org/drawingml/2006/main">
               <a:ext uri="{FF2B5EF4-FFF2-40B4-BE49-F238E27FC236}">
-                <a16:creationId xmlns:a16="http://schemas.microsoft.com/office/drawing/2014/main" id="{594E4455-E01E-4D6E-AF32-BB553B1FEF7B}"/>
+                <a16:creationId xmlns:a16="http://schemas.microsoft.com/office/drawing/2014/main" id="{E1347954-1373-49C9-AD89-A1EBC044B554}"/>
               </a:ext>
             </a:extLst>
           </p:cNvPr>
@@ -12398,7 +12598,7 @@
           <p:cNvPr id="13" name="">
             <a:extLst xmlns:a="http://schemas.openxmlformats.org/drawingml/2006/main">
               <a:ext uri="{FF2B5EF4-FFF2-40B4-BE49-F238E27FC236}">
-                <a16:creationId xmlns:a16="http://schemas.microsoft.com/office/drawing/2014/main" id="{BF6A986B-D75D-4A63-96D4-A3ABE8F79A97}"/>
+                <a16:creationId xmlns:a16="http://schemas.microsoft.com/office/drawing/2014/main" id="{EFCBD75F-9CFF-4CB2-9DC6-4DABF525CC22}"/>
               </a:ext>
             </a:extLst>
           </p:cNvPr>
@@ -12455,7 +12655,7 @@
           <p:cNvPr id="14" name="">
             <a:extLst xmlns:a="http://schemas.openxmlformats.org/drawingml/2006/main">
               <a:ext uri="{FF2B5EF4-FFF2-40B4-BE49-F238E27FC236}">
-                <a16:creationId xmlns:a16="http://schemas.microsoft.com/office/drawing/2014/main" id="{0339500C-3A7D-4320-A193-9133723AE454}"/>
+                <a16:creationId xmlns:a16="http://schemas.microsoft.com/office/drawing/2014/main" id="{4B36FADA-F7E2-4C48-9EE2-CC4F67EC5AA6}"/>
               </a:ext>
             </a:extLst>
           </p:cNvPr>
@@ -12489,7 +12689,7 @@
           <p:cNvPr id="15" name="">
             <a:extLst xmlns:a="http://schemas.openxmlformats.org/drawingml/2006/main">
               <a:ext uri="{FF2B5EF4-FFF2-40B4-BE49-F238E27FC236}">
-                <a16:creationId xmlns:a16="http://schemas.microsoft.com/office/drawing/2014/main" id="{72E22E5A-47C1-49AA-8FDB-CDC2F73DB994}"/>
+                <a16:creationId xmlns:a16="http://schemas.microsoft.com/office/drawing/2014/main" id="{366FDC48-E9C2-4BC5-AF18-51D75D592593}"/>
               </a:ext>
             </a:extLst>
           </p:cNvPr>
@@ -12521,7 +12721,7 @@
           <p:cNvPr id="16" name="">
             <a:extLst xmlns:a="http://schemas.openxmlformats.org/drawingml/2006/main">
               <a:ext uri="{FF2B5EF4-FFF2-40B4-BE49-F238E27FC236}">
-                <a16:creationId xmlns:a16="http://schemas.microsoft.com/office/drawing/2014/main" id="{542A1CB0-A6D2-4DB6-9666-4AD9BA31B384}"/>
+                <a16:creationId xmlns:a16="http://schemas.microsoft.com/office/drawing/2014/main" id="{1724FDE4-220E-44B6-9814-4BA8DA1E4C99}"/>
               </a:ext>
             </a:extLst>
           </p:cNvPr>
@@ -12578,7 +12778,7 @@
           <p:cNvPr id="17" name="">
             <a:extLst xmlns:a="http://schemas.openxmlformats.org/drawingml/2006/main">
               <a:ext uri="{FF2B5EF4-FFF2-40B4-BE49-F238E27FC236}">
-                <a16:creationId xmlns:a16="http://schemas.microsoft.com/office/drawing/2014/main" id="{810F79F6-5B88-4BB8-B8CD-09AB65D84CD5}"/>
+                <a16:creationId xmlns:a16="http://schemas.microsoft.com/office/drawing/2014/main" id="{4A18E317-63A2-49C9-93AC-F439454B9880}"/>
               </a:ext>
             </a:extLst>
           </p:cNvPr>
@@ -12635,7 +12835,7 @@
           <p:cNvPr id="18" name="">
             <a:extLst xmlns:a="http://schemas.openxmlformats.org/drawingml/2006/main">
               <a:ext uri="{FF2B5EF4-FFF2-40B4-BE49-F238E27FC236}">
-                <a16:creationId xmlns:a16="http://schemas.microsoft.com/office/drawing/2014/main" id="{504E5113-8321-48F7-8412-57CB27C89871}"/>
+                <a16:creationId xmlns:a16="http://schemas.microsoft.com/office/drawing/2014/main" id="{989FA7B8-66C4-450D-804E-0CF7483CF988}"/>
               </a:ext>
             </a:extLst>
           </p:cNvPr>
@@ -12669,7 +12869,7 @@
           <p:cNvPr id="19" name="">
             <a:extLst xmlns:a="http://schemas.openxmlformats.org/drawingml/2006/main">
               <a:ext uri="{FF2B5EF4-FFF2-40B4-BE49-F238E27FC236}">
-                <a16:creationId xmlns:a16="http://schemas.microsoft.com/office/drawing/2014/main" id="{4F0539F7-F6E5-4D7F-BFB7-1969B15A5C95}"/>
+                <a16:creationId xmlns:a16="http://schemas.microsoft.com/office/drawing/2014/main" id="{F8104CE5-64B0-490D-80D4-EE37CACEC45B}"/>
               </a:ext>
             </a:extLst>
           </p:cNvPr>
@@ -12701,7 +12901,7 @@
           <p:cNvPr id="20" name="">
             <a:extLst xmlns:a="http://schemas.openxmlformats.org/drawingml/2006/main">
               <a:ext uri="{FF2B5EF4-FFF2-40B4-BE49-F238E27FC236}">
-                <a16:creationId xmlns:a16="http://schemas.microsoft.com/office/drawing/2014/main" id="{6E52A620-B76C-4CF3-A4F6-330DC4FF2F91}"/>
+                <a16:creationId xmlns:a16="http://schemas.microsoft.com/office/drawing/2014/main" id="{6FA23CEC-203C-4693-B4F0-8F7637A59B29}"/>
               </a:ext>
             </a:extLst>
           </p:cNvPr>
@@ -12758,7 +12958,7 @@
           <p:cNvPr id="21" name="">
             <a:extLst xmlns:a="http://schemas.openxmlformats.org/drawingml/2006/main">
               <a:ext uri="{FF2B5EF4-FFF2-40B4-BE49-F238E27FC236}">
-                <a16:creationId xmlns:a16="http://schemas.microsoft.com/office/drawing/2014/main" id="{14058CED-EDA1-4596-A114-F178DAFF9E12}"/>
+                <a16:creationId xmlns:a16="http://schemas.microsoft.com/office/drawing/2014/main" id="{FFD763F3-A5F8-4F67-B74F-9E1A81F3053D}"/>
               </a:ext>
             </a:extLst>
           </p:cNvPr>
@@ -12815,7 +13015,7 @@
           <p:cNvPr id="22" name="">
             <a:extLst xmlns:a="http://schemas.openxmlformats.org/drawingml/2006/main">
               <a:ext uri="{FF2B5EF4-FFF2-40B4-BE49-F238E27FC236}">
-                <a16:creationId xmlns:a16="http://schemas.microsoft.com/office/drawing/2014/main" id="{936A6B0D-12E4-4A1E-988D-5B1C3A367E6A}"/>
+                <a16:creationId xmlns:a16="http://schemas.microsoft.com/office/drawing/2014/main" id="{CF44D52B-0A0B-4735-BE18-00E70C299D95}"/>
               </a:ext>
             </a:extLst>
           </p:cNvPr>
@@ -12870,7 +13070,7 @@
     </p:spTree>
     <p:extLst>
       <p:ext uri="{BB962C8B-B14F-4D97-AF65-F5344CB8AC3E}">
-        <p14:creationId xmlns:p14="http://schemas.microsoft.com/office/powerpoint/2010/main" val="1901092277"/>
+        <p14:creationId xmlns:p14="http://schemas.microsoft.com/office/powerpoint/2010/main" val="1674051433"/>
       </p:ext>
     </p:extLst>
   </p:cSld>
@@ -13071,7 +13271,7 @@
           <p:cNvPr id="22" name="">
             <a:extLst xmlns:a="http://schemas.openxmlformats.org/drawingml/2006/main">
               <a:ext uri="{FF2B5EF4-FFF2-40B4-BE49-F238E27FC236}">
-                <a16:creationId xmlns:a16="http://schemas.microsoft.com/office/drawing/2014/main" id="{F91017BB-6265-4754-BF54-D4243FA5C70E}"/>
+                <a16:creationId xmlns:a16="http://schemas.microsoft.com/office/drawing/2014/main" id="{4470CFBE-0C48-42E5-B9FB-DDCC8A257727}"/>
               </a:ext>
             </a:extLst>
           </p:cNvPr>
@@ -13103,7 +13303,7 @@
           <p:cNvPr id="2" name="">
             <a:extLst xmlns:a="http://schemas.openxmlformats.org/drawingml/2006/main">
               <a:ext uri="{FF2B5EF4-FFF2-40B4-BE49-F238E27FC236}">
-                <a16:creationId xmlns:a16="http://schemas.microsoft.com/office/drawing/2014/main" id="{6E9CA6A5-F670-4DA6-B8C2-3AFB86C36A13}"/>
+                <a16:creationId xmlns:a16="http://schemas.microsoft.com/office/drawing/2014/main" id="{3B4600C0-2AA5-47DB-9D9B-BAA1D1EF67AD}"/>
               </a:ext>
             </a:extLst>
           </p:cNvPr>
@@ -13160,7 +13360,7 @@
           <p:cNvPr id="3" name="">
             <a:extLst xmlns:a="http://schemas.openxmlformats.org/drawingml/2006/main">
               <a:ext uri="{FF2B5EF4-FFF2-40B4-BE49-F238E27FC236}">
-                <a16:creationId xmlns:a16="http://schemas.microsoft.com/office/drawing/2014/main" id="{0729CC2C-9795-4C11-8D84-D3101765A432}"/>
+                <a16:creationId xmlns:a16="http://schemas.microsoft.com/office/drawing/2014/main" id="{9F285147-1BDB-4527-A517-6FCED9A926EB}"/>
               </a:ext>
             </a:extLst>
           </p:cNvPr>
@@ -13192,7 +13392,7 @@
           <p:cNvPr id="4" name="">
             <a:extLst xmlns:a="http://schemas.openxmlformats.org/drawingml/2006/main">
               <a:ext uri="{FF2B5EF4-FFF2-40B4-BE49-F238E27FC236}">
-                <a16:creationId xmlns:a16="http://schemas.microsoft.com/office/drawing/2014/main" id="{1DB86B0C-BDAB-4349-AC76-D575574CF28E}"/>
+                <a16:creationId xmlns:a16="http://schemas.microsoft.com/office/drawing/2014/main" id="{2E980C3A-ACDB-448B-BC05-FB9C9DE1AC90}"/>
               </a:ext>
             </a:extLst>
           </p:cNvPr>
@@ -13249,7 +13449,7 @@
           <p:cNvPr id="5" name="">
             <a:extLst xmlns:a="http://schemas.openxmlformats.org/drawingml/2006/main">
               <a:ext uri="{FF2B5EF4-FFF2-40B4-BE49-F238E27FC236}">
-                <a16:creationId xmlns:a16="http://schemas.microsoft.com/office/drawing/2014/main" id="{AA94D546-95F2-49B9-AAA6-404645E6581B}"/>
+                <a16:creationId xmlns:a16="http://schemas.microsoft.com/office/drawing/2014/main" id="{2CF983D3-ACF7-4297-9B0F-CA9A87B71E90}"/>
               </a:ext>
             </a:extLst>
           </p:cNvPr>
@@ -13306,7 +13506,7 @@
           <p:cNvPr id="6" name="">
             <a:extLst xmlns:a="http://schemas.openxmlformats.org/drawingml/2006/main">
               <a:ext uri="{FF2B5EF4-FFF2-40B4-BE49-F238E27FC236}">
-                <a16:creationId xmlns:a16="http://schemas.microsoft.com/office/drawing/2014/main" id="{3AEC253E-D00B-4EB2-9EBF-79E130F336F6}"/>
+                <a16:creationId xmlns:a16="http://schemas.microsoft.com/office/drawing/2014/main" id="{AC55C194-79C9-4401-9D60-C0AAC66B9D84}"/>
               </a:ext>
             </a:extLst>
           </p:cNvPr>
@@ -13363,7 +13563,7 @@
           <p:cNvPr id="7" name="">
             <a:extLst xmlns:a="http://schemas.openxmlformats.org/drawingml/2006/main">
               <a:ext uri="{FF2B5EF4-FFF2-40B4-BE49-F238E27FC236}">
-                <a16:creationId xmlns:a16="http://schemas.microsoft.com/office/drawing/2014/main" id="{A2BB18A4-4AD2-41A4-A27F-44073838A298}"/>
+                <a16:creationId xmlns:a16="http://schemas.microsoft.com/office/drawing/2014/main" id="{B6C987DC-363A-4625-8F6A-782491112B14}"/>
               </a:ext>
             </a:extLst>
           </p:cNvPr>
@@ -13395,7 +13595,7 @@
           <p:cNvPr id="8" name="">
             <a:extLst xmlns:a="http://schemas.openxmlformats.org/drawingml/2006/main">
               <a:ext uri="{FF2B5EF4-FFF2-40B4-BE49-F238E27FC236}">
-                <a16:creationId xmlns:a16="http://schemas.microsoft.com/office/drawing/2014/main" id="{0F3E360E-6130-444C-A1E4-3AEF8B798A02}"/>
+                <a16:creationId xmlns:a16="http://schemas.microsoft.com/office/drawing/2014/main" id="{4F716E89-D782-4350-A8FC-95D880B71D2A}"/>
               </a:ext>
             </a:extLst>
           </p:cNvPr>
@@ -13452,7 +13652,7 @@
           <p:cNvPr id="9" name="">
             <a:extLst xmlns:a="http://schemas.openxmlformats.org/drawingml/2006/main">
               <a:ext uri="{FF2B5EF4-FFF2-40B4-BE49-F238E27FC236}">
-                <a16:creationId xmlns:a16="http://schemas.microsoft.com/office/drawing/2014/main" id="{0574B52F-2836-4726-8CBE-79A1F05F6733}"/>
+                <a16:creationId xmlns:a16="http://schemas.microsoft.com/office/drawing/2014/main" id="{28193374-1C64-49C4-8BFF-43F1E29CACFD}"/>
               </a:ext>
             </a:extLst>
           </p:cNvPr>
@@ -13509,7 +13709,7 @@
           <p:cNvPr id="10" name="">
             <a:extLst xmlns:a="http://schemas.openxmlformats.org/drawingml/2006/main">
               <a:ext uri="{FF2B5EF4-FFF2-40B4-BE49-F238E27FC236}">
-                <a16:creationId xmlns:a16="http://schemas.microsoft.com/office/drawing/2014/main" id="{45A23700-E220-4488-800D-996E58EEA5D1}"/>
+                <a16:creationId xmlns:a16="http://schemas.microsoft.com/office/drawing/2014/main" id="{7E1DE9C9-D07D-4F06-BE65-9B7C2F854430}"/>
               </a:ext>
             </a:extLst>
           </p:cNvPr>
@@ -13543,7 +13743,7 @@
           <p:cNvPr id="11" name="">
             <a:extLst xmlns:a="http://schemas.openxmlformats.org/drawingml/2006/main">
               <a:ext uri="{FF2B5EF4-FFF2-40B4-BE49-F238E27FC236}">
-                <a16:creationId xmlns:a16="http://schemas.microsoft.com/office/drawing/2014/main" id="{6DBDABFD-1F23-4583-BD61-B164EE8CB4B1}"/>
+                <a16:creationId xmlns:a16="http://schemas.microsoft.com/office/drawing/2014/main" id="{8D5B152D-582D-4FBB-82C0-A67BC384359E}"/>
               </a:ext>
             </a:extLst>
           </p:cNvPr>
@@ -13575,7 +13775,7 @@
           <p:cNvPr id="12" name="">
             <a:extLst xmlns:a="http://schemas.openxmlformats.org/drawingml/2006/main">
               <a:ext uri="{FF2B5EF4-FFF2-40B4-BE49-F238E27FC236}">
-                <a16:creationId xmlns:a16="http://schemas.microsoft.com/office/drawing/2014/main" id="{DA21EA71-6121-40C9-9818-A9028BF714A2}"/>
+                <a16:creationId xmlns:a16="http://schemas.microsoft.com/office/drawing/2014/main" id="{F4868B07-5973-41FE-A524-5CDA6225A96A}"/>
               </a:ext>
             </a:extLst>
           </p:cNvPr>
@@ -13632,7 +13832,7 @@
           <p:cNvPr id="13" name="">
             <a:extLst xmlns:a="http://schemas.openxmlformats.org/drawingml/2006/main">
               <a:ext uri="{FF2B5EF4-FFF2-40B4-BE49-F238E27FC236}">
-                <a16:creationId xmlns:a16="http://schemas.microsoft.com/office/drawing/2014/main" id="{A2C2CEBD-4FC4-4535-9554-C1E55767C468}"/>
+                <a16:creationId xmlns:a16="http://schemas.microsoft.com/office/drawing/2014/main" id="{EA26A200-445D-4172-8C51-C36F469629EE}"/>
               </a:ext>
             </a:extLst>
           </p:cNvPr>
@@ -13689,7 +13889,7 @@
           <p:cNvPr id="14" name="">
             <a:extLst xmlns:a="http://schemas.openxmlformats.org/drawingml/2006/main">
               <a:ext uri="{FF2B5EF4-FFF2-40B4-BE49-F238E27FC236}">
-                <a16:creationId xmlns:a16="http://schemas.microsoft.com/office/drawing/2014/main" id="{A01C7ECF-BAA9-429E-AB6A-F011AB835DD6}"/>
+                <a16:creationId xmlns:a16="http://schemas.microsoft.com/office/drawing/2014/main" id="{68004434-1BA5-4976-A436-93A94C87ECC6}"/>
               </a:ext>
             </a:extLst>
           </p:cNvPr>
@@ -13723,7 +13923,7 @@
           <p:cNvPr id="15" name="">
             <a:extLst xmlns:a="http://schemas.openxmlformats.org/drawingml/2006/main">
               <a:ext uri="{FF2B5EF4-FFF2-40B4-BE49-F238E27FC236}">
-                <a16:creationId xmlns:a16="http://schemas.microsoft.com/office/drawing/2014/main" id="{AAAD4861-D930-4B6D-A423-F77D5A226BA6}"/>
+                <a16:creationId xmlns:a16="http://schemas.microsoft.com/office/drawing/2014/main" id="{B8E01FD0-948A-4C71-8E1B-389E293E6851}"/>
               </a:ext>
             </a:extLst>
           </p:cNvPr>
@@ -13755,7 +13955,7 @@
           <p:cNvPr id="16" name="">
             <a:extLst xmlns:a="http://schemas.openxmlformats.org/drawingml/2006/main">
               <a:ext uri="{FF2B5EF4-FFF2-40B4-BE49-F238E27FC236}">
-                <a16:creationId xmlns:a16="http://schemas.microsoft.com/office/drawing/2014/main" id="{E35AC38A-8AF2-4B63-9CDA-768ACB9AB5BA}"/>
+                <a16:creationId xmlns:a16="http://schemas.microsoft.com/office/drawing/2014/main" id="{2BC5FA98-F1A4-4E41-B6AC-811CF7853961}"/>
               </a:ext>
             </a:extLst>
           </p:cNvPr>
@@ -13812,7 +14012,7 @@
           <p:cNvPr id="17" name="">
             <a:extLst xmlns:a="http://schemas.openxmlformats.org/drawingml/2006/main">
               <a:ext uri="{FF2B5EF4-FFF2-40B4-BE49-F238E27FC236}">
-                <a16:creationId xmlns:a16="http://schemas.microsoft.com/office/drawing/2014/main" id="{E8287E48-ACA9-4E24-B916-FD606E32B723}"/>
+                <a16:creationId xmlns:a16="http://schemas.microsoft.com/office/drawing/2014/main" id="{3A9C666C-66F7-4795-A9B6-61F3E6F86233}"/>
               </a:ext>
             </a:extLst>
           </p:cNvPr>
@@ -13869,7 +14069,7 @@
           <p:cNvPr id="18" name="">
             <a:extLst xmlns:a="http://schemas.openxmlformats.org/drawingml/2006/main">
               <a:ext uri="{FF2B5EF4-FFF2-40B4-BE49-F238E27FC236}">
-                <a16:creationId xmlns:a16="http://schemas.microsoft.com/office/drawing/2014/main" id="{B23934C9-71D3-424D-ADC8-496826B89B11}"/>
+                <a16:creationId xmlns:a16="http://schemas.microsoft.com/office/drawing/2014/main" id="{E68BD5AD-B296-44B4-9D7D-E38C58AE7608}"/>
               </a:ext>
             </a:extLst>
           </p:cNvPr>
@@ -13903,7 +14103,7 @@
           <p:cNvPr id="19" name="">
             <a:extLst xmlns:a="http://schemas.openxmlformats.org/drawingml/2006/main">
               <a:ext uri="{FF2B5EF4-FFF2-40B4-BE49-F238E27FC236}">
-                <a16:creationId xmlns:a16="http://schemas.microsoft.com/office/drawing/2014/main" id="{877D84C7-B55E-4677-B48B-936CCB106F62}"/>
+                <a16:creationId xmlns:a16="http://schemas.microsoft.com/office/drawing/2014/main" id="{65412DE3-ADE4-4FAE-97A4-1F53933A5D58}"/>
               </a:ext>
             </a:extLst>
           </p:cNvPr>
@@ -13935,7 +14135,7 @@
           <p:cNvPr id="20" name="">
             <a:extLst xmlns:a="http://schemas.openxmlformats.org/drawingml/2006/main">
               <a:ext uri="{FF2B5EF4-FFF2-40B4-BE49-F238E27FC236}">
-                <a16:creationId xmlns:a16="http://schemas.microsoft.com/office/drawing/2014/main" id="{9D4220B2-99EE-437D-AF62-94DEDC121251}"/>
+                <a16:creationId xmlns:a16="http://schemas.microsoft.com/office/drawing/2014/main" id="{5B837D6D-6215-4654-95F7-86505A3B82C1}"/>
               </a:ext>
             </a:extLst>
           </p:cNvPr>
@@ -13992,7 +14192,7 @@
           <p:cNvPr id="21" name="">
             <a:extLst xmlns:a="http://schemas.openxmlformats.org/drawingml/2006/main">
               <a:ext uri="{FF2B5EF4-FFF2-40B4-BE49-F238E27FC236}">
-                <a16:creationId xmlns:a16="http://schemas.microsoft.com/office/drawing/2014/main" id="{B79EE834-A31A-46E4-A537-4C269FF47865}"/>
+                <a16:creationId xmlns:a16="http://schemas.microsoft.com/office/drawing/2014/main" id="{35ED08A3-7181-4026-A8B1-C1B739C847F2}"/>
               </a:ext>
             </a:extLst>
           </p:cNvPr>
@@ -14047,7 +14247,7 @@
     </p:spTree>
     <p:extLst>
       <p:ext uri="{BB962C8B-B14F-4D97-AF65-F5344CB8AC3E}">
-        <p14:creationId xmlns:p14="http://schemas.microsoft.com/office/powerpoint/2010/main" val="2120338020"/>
+        <p14:creationId xmlns:p14="http://schemas.microsoft.com/office/powerpoint/2010/main" val="1220895701"/>
       </p:ext>
     </p:extLst>
   </p:cSld>
